--- a/10-Knowledge-Products/KP1-GEA/videos/module_5/en/decks/KP1_M5_5.2_Deck_v0.1.pptx
+++ b/10-Knowledge-Products/KP1-GEA/videos/module_5/en/decks/KP1_M5_5.2_Deck_v0.1.pptx
@@ -12606,73 +12606,18 @@
       </p:sp>
       <p:sp>
         <p:nvSpPr>
-          <p:cNvPr id="4" name="TextBox 3"/>
-          <p:cNvSpPr txBox="1"/>
-          <p:nvPr/>
-        </p:nvSpPr>
-        <p:spPr>
-          <a:xfrm>
-            <a:off x="658368" y="1600200"/>
-            <a:ext cx="10881360" cy="2651760"/>
-          </a:xfrm>
-          <a:prstGeom prst="rect">
-            <a:avLst/>
-          </a:prstGeom>
-          <a:noFill/>
-        </p:spPr>
-        <p:txBody>
-          <a:bodyPr wrap="square">
-            <a:spAutoFit/>
-          </a:bodyPr>
-          <a:lstStyle/>
-          <a:p>
-            <a:pPr>
-              <a:spcAft>
-                <a:spcPts val="1200"/>
-              </a:spcAft>
-            </a:pPr>
-            <a:r>
-              <a:rPr sz="2000" b="0" i="0">
-                <a:solidFill>
-                  <a:srgbClr val="1A1A1A"/>
-                </a:solidFill>
-                <a:latin typeface="Arial"/>
-              </a:rPr>
-              <a:t>Before the interviews, you paste what you know about a body — its mandate, its known systems, its registries. The AI returns a four-layer capture template: the right questions per layer, a reminder to describe and not recommend, and a column to record where each answer came from.</a:t>
-            </a:r>
-          </a:p>
-          <a:p>
-            <a:pPr>
-              <a:spcAft>
-                <a:spcPts val="1200"/>
-              </a:spcAft>
-            </a:pPr>
-            <a:r>
-              <a:rPr sz="2000" b="0" i="0">
-                <a:solidFill>
-                  <a:srgbClr val="1A1A1A"/>
-                </a:solidFill>
-                <a:latin typeface="Arial"/>
-              </a:rPr>
-              <a:t>The template is a starting structure. You still ask the questions and record the real answers.</a:t>
-            </a:r>
-          </a:p>
-        </p:txBody>
-      </p:sp>
-      <p:sp>
-        <p:nvSpPr>
-          <p:cNvPr id="5" name="Rounded Rectangle 4"/>
+          <p:cNvPr id="4" name="Rounded Rectangle 3"/>
           <p:cNvSpPr/>
           <p:nvPr/>
         </p:nvSpPr>
         <p:spPr>
           <a:xfrm>
-            <a:off x="658368" y="4434840"/>
-            <a:ext cx="10881360" cy="1325880"/>
+            <a:off x="658368" y="1645920"/>
+            <a:ext cx="3246120" cy="3840480"/>
           </a:xfrm>
           <a:prstGeom prst="roundRect">
             <a:avLst>
-              <a:gd name="adj" fmla="val 4500"/>
+              <a:gd name="adj" fmla="val 8000"/>
             </a:avLst>
           </a:prstGeom>
           <a:solidFill>
@@ -12698,23 +12643,386 @@
           </a:fontRef>
         </p:style>
         <p:txBody>
-          <a:bodyPr rtlCol="0" anchor="ctr"/>
+          <a:bodyPr rtlCol="0" anchor="t" lIns="128016" rIns="128016" tIns="91440" bIns="54864" wrap="square"/>
           <a:lstStyle/>
           <a:p>
-            <a:pPr algn="ctr"/>
+            <a:pPr algn="l">
+              <a:spcAft>
+                <a:spcPts val="300"/>
+              </a:spcAft>
+            </a:pPr>
+            <a:r>
+              <a:rPr sz="1200" b="1" i="0">
+                <a:solidFill>
+                  <a:srgbClr val="006E96"/>
+                </a:solidFill>
+                <a:latin typeface="Arial"/>
+              </a:rPr>
+              <a:t>YOU PASTE</a:t>
+            </a:r>
+          </a:p>
+          <a:p>
+            <a:pPr algn="l">
+              <a:spcAft>
+                <a:spcPts val="300"/>
+              </a:spcAft>
+            </a:pPr>
+            <a:r>
+              <a:rPr sz="1450" b="0" i="0">
+                <a:solidFill>
+                  <a:srgbClr val="1A1A1A"/>
+                </a:solidFill>
+                <a:latin typeface="Arial"/>
+              </a:rPr>
+              <a:t>A body's mandate.</a:t>
+            </a:r>
+          </a:p>
+          <a:p>
+            <a:pPr algn="l">
+              <a:spcAft>
+                <a:spcPts val="300"/>
+              </a:spcAft>
+            </a:pPr>
+            <a:r>
+              <a:rPr sz="1450" b="0" i="0">
+                <a:solidFill>
+                  <a:srgbClr val="1A1A1A"/>
+                </a:solidFill>
+                <a:latin typeface="Arial"/>
+              </a:rPr>
+              <a:t>Its known systems.</a:t>
+            </a:r>
+          </a:p>
+          <a:p>
+            <a:pPr algn="l">
+              <a:spcAft>
+                <a:spcPts val="300"/>
+              </a:spcAft>
+            </a:pPr>
+            <a:r>
+              <a:rPr sz="1450" b="0" i="0">
+                <a:solidFill>
+                  <a:srgbClr val="1A1A1A"/>
+                </a:solidFill>
+                <a:latin typeface="Arial"/>
+              </a:rPr>
+              <a:t>Its registries.</a:t>
+            </a:r>
           </a:p>
         </p:txBody>
       </p:sp>
       <p:sp>
         <p:nvSpPr>
-          <p:cNvPr id="6" name="TextBox 5"/>
+          <p:cNvPr id="5" name="Rounded Rectangle 4"/>
+          <p:cNvSpPr/>
+          <p:nvPr/>
+        </p:nvSpPr>
+        <p:spPr>
+          <a:xfrm>
+            <a:off x="4471416" y="1645920"/>
+            <a:ext cx="3246120" cy="3840480"/>
+          </a:xfrm>
+          <a:prstGeom prst="roundRect">
+            <a:avLst>
+              <a:gd name="adj" fmla="val 8000"/>
+            </a:avLst>
+          </a:prstGeom>
+          <a:solidFill>
+            <a:srgbClr val="F2F2F2"/>
+          </a:solidFill>
+          <a:ln>
+            <a:noFill/>
+          </a:ln>
+          <a:effectLst/>
+        </p:spPr>
+        <p:style>
+          <a:lnRef idx="1">
+            <a:schemeClr val="accent1"/>
+          </a:lnRef>
+          <a:fillRef idx="3">
+            <a:schemeClr val="accent1"/>
+          </a:fillRef>
+          <a:effectRef idx="2">
+            <a:schemeClr val="accent1"/>
+          </a:effectRef>
+          <a:fontRef idx="minor">
+            <a:schemeClr val="lt1"/>
+          </a:fontRef>
+        </p:style>
+        <p:txBody>
+          <a:bodyPr rtlCol="0" anchor="t" lIns="128016" rIns="128016" tIns="91440" bIns="54864" wrap="square"/>
+          <a:lstStyle/>
+          <a:p>
+            <a:pPr algn="l">
+              <a:spcAft>
+                <a:spcPts val="300"/>
+              </a:spcAft>
+            </a:pPr>
+            <a:r>
+              <a:rPr sz="1200" b="1" i="0">
+                <a:solidFill>
+                  <a:srgbClr val="006E96"/>
+                </a:solidFill>
+                <a:latin typeface="Arial"/>
+              </a:rPr>
+              <a:t>THE AI RETURNS</a:t>
+            </a:r>
+          </a:p>
+          <a:p>
+            <a:pPr algn="l">
+              <a:spcAft>
+                <a:spcPts val="300"/>
+              </a:spcAft>
+            </a:pPr>
+            <a:r>
+              <a:rPr sz="1450" b="0" i="0">
+                <a:solidFill>
+                  <a:srgbClr val="1A1A1A"/>
+                </a:solidFill>
+                <a:latin typeface="Arial"/>
+              </a:rPr>
+              <a:t>A four-layer capture template.</a:t>
+            </a:r>
+          </a:p>
+          <a:p>
+            <a:pPr algn="l">
+              <a:spcAft>
+                <a:spcPts val="300"/>
+              </a:spcAft>
+            </a:pPr>
+            <a:r>
+              <a:rPr sz="1450" b="0" i="0">
+                <a:solidFill>
+                  <a:srgbClr val="1A1A1A"/>
+                </a:solidFill>
+                <a:latin typeface="Arial"/>
+              </a:rPr>
+              <a:t>The right questions per layer.</a:t>
+            </a:r>
+          </a:p>
+          <a:p>
+            <a:pPr algn="l">
+              <a:spcAft>
+                <a:spcPts val="300"/>
+              </a:spcAft>
+            </a:pPr>
+            <a:r>
+              <a:rPr sz="1450" b="0" i="0">
+                <a:solidFill>
+                  <a:srgbClr val="1A1A1A"/>
+                </a:solidFill>
+                <a:latin typeface="Arial"/>
+              </a:rPr>
+              <a:t>A describe-don't-recommend reminder.</a:t>
+            </a:r>
+          </a:p>
+          <a:p>
+            <a:pPr algn="l">
+              <a:spcAft>
+                <a:spcPts val="300"/>
+              </a:spcAft>
+            </a:pPr>
+            <a:r>
+              <a:rPr sz="1450" b="0" i="0">
+                <a:solidFill>
+                  <a:srgbClr val="1A1A1A"/>
+                </a:solidFill>
+                <a:latin typeface="Arial"/>
+              </a:rPr>
+              <a:t>A column for where each answer came from.</a:t>
+            </a:r>
+          </a:p>
+        </p:txBody>
+      </p:sp>
+      <p:sp>
+        <p:nvSpPr>
+          <p:cNvPr id="6" name="Rounded Rectangle 5"/>
+          <p:cNvSpPr/>
+          <p:nvPr/>
+        </p:nvSpPr>
+        <p:spPr>
+          <a:xfrm>
+            <a:off x="8284464" y="1645920"/>
+            <a:ext cx="3246120" cy="3840480"/>
+          </a:xfrm>
+          <a:prstGeom prst="roundRect">
+            <a:avLst>
+              <a:gd name="adj" fmla="val 8000"/>
+            </a:avLst>
+          </a:prstGeom>
+          <a:solidFill>
+            <a:srgbClr val="006E96"/>
+          </a:solidFill>
+          <a:ln>
+            <a:noFill/>
+          </a:ln>
+          <a:effectLst/>
+        </p:spPr>
+        <p:style>
+          <a:lnRef idx="1">
+            <a:schemeClr val="accent1"/>
+          </a:lnRef>
+          <a:fillRef idx="3">
+            <a:schemeClr val="accent1"/>
+          </a:fillRef>
+          <a:effectRef idx="2">
+            <a:schemeClr val="accent1"/>
+          </a:effectRef>
+          <a:fontRef idx="minor">
+            <a:schemeClr val="lt1"/>
+          </a:fontRef>
+        </p:style>
+        <p:txBody>
+          <a:bodyPr rtlCol="0" anchor="t" lIns="128016" rIns="128016" tIns="91440" bIns="54864" wrap="square"/>
+          <a:lstStyle/>
+          <a:p>
+            <a:pPr algn="l">
+              <a:spcAft>
+                <a:spcPts val="300"/>
+              </a:spcAft>
+            </a:pPr>
+            <a:r>
+              <a:rPr sz="1200" b="1" i="0">
+                <a:solidFill>
+                  <a:srgbClr val="FFFFFF"/>
+                </a:solidFill>
+                <a:latin typeface="Arial"/>
+              </a:rPr>
+              <a:t>YOU DECIDE</a:t>
+            </a:r>
+          </a:p>
+          <a:p>
+            <a:pPr algn="l">
+              <a:spcAft>
+                <a:spcPts val="300"/>
+              </a:spcAft>
+            </a:pPr>
+            <a:r>
+              <a:rPr sz="1450" b="0" i="0">
+                <a:solidFill>
+                  <a:srgbClr val="FFFFFF"/>
+                </a:solidFill>
+                <a:latin typeface="Arial"/>
+              </a:rPr>
+              <a:t>Ask the questions.</a:t>
+            </a:r>
+          </a:p>
+          <a:p>
+            <a:pPr algn="l">
+              <a:spcAft>
+                <a:spcPts val="300"/>
+              </a:spcAft>
+            </a:pPr>
+            <a:r>
+              <a:rPr sz="1450" b="0" i="0">
+                <a:solidFill>
+                  <a:srgbClr val="FFFFFF"/>
+                </a:solidFill>
+                <a:latin typeface="Arial"/>
+              </a:rPr>
+              <a:t>Record the real answers.</a:t>
+            </a:r>
+          </a:p>
+          <a:p>
+            <a:pPr algn="l">
+              <a:spcAft>
+                <a:spcPts val="300"/>
+              </a:spcAft>
+            </a:pPr>
+            <a:r>
+              <a:rPr sz="1450" b="0" i="0">
+                <a:solidFill>
+                  <a:srgbClr val="FFFFFF"/>
+                </a:solidFill>
+                <a:latin typeface="Arial"/>
+              </a:rPr>
+              <a:t>The template is a structure, never the findings.</a:t>
+            </a:r>
+          </a:p>
+        </p:txBody>
+      </p:sp>
+      <p:cxnSp>
+        <p:nvCxnSpPr>
+          <p:cNvPr id="7" name="Connector 6"/>
+          <p:cNvCxnSpPr/>
+          <p:nvPr/>
+        </p:nvCxnSpPr>
+        <p:spPr>
+          <a:xfrm>
+            <a:off x="3977639" y="3566160"/>
+            <a:ext cx="420625" cy="0"/>
+          </a:xfrm>
+          <a:prstGeom prst="line">
+            <a:avLst/>
+          </a:prstGeom>
+          <a:ln w="25400">
+            <a:solidFill>
+              <a:srgbClr val="006E96"/>
+            </a:solidFill>
+            <a:tailEnd type="triangle" w="med" len="med"/>
+          </a:ln>
+        </p:spPr>
+        <p:style>
+          <a:lnRef idx="2">
+            <a:schemeClr val="accent1"/>
+          </a:lnRef>
+          <a:fillRef idx="0">
+            <a:schemeClr val="accent1"/>
+          </a:fillRef>
+          <a:effectRef idx="1">
+            <a:schemeClr val="accent1"/>
+          </a:effectRef>
+          <a:fontRef idx="minor">
+            <a:schemeClr val="tx1"/>
+          </a:fontRef>
+        </p:style>
+      </p:cxnSp>
+      <p:cxnSp>
+        <p:nvCxnSpPr>
+          <p:cNvPr id="8" name="Connector 7"/>
+          <p:cNvCxnSpPr/>
+          <p:nvPr/>
+        </p:nvCxnSpPr>
+        <p:spPr>
+          <a:xfrm>
+            <a:off x="7790688" y="3566160"/>
+            <a:ext cx="420624" cy="0"/>
+          </a:xfrm>
+          <a:prstGeom prst="line">
+            <a:avLst/>
+          </a:prstGeom>
+          <a:ln w="25400">
+            <a:solidFill>
+              <a:srgbClr val="006E96"/>
+            </a:solidFill>
+            <a:tailEnd type="triangle" w="med" len="med"/>
+          </a:ln>
+        </p:spPr>
+        <p:style>
+          <a:lnRef idx="2">
+            <a:schemeClr val="accent1"/>
+          </a:lnRef>
+          <a:fillRef idx="0">
+            <a:schemeClr val="accent1"/>
+          </a:fillRef>
+          <a:effectRef idx="1">
+            <a:schemeClr val="accent1"/>
+          </a:effectRef>
+          <a:fontRef idx="minor">
+            <a:schemeClr val="tx1"/>
+          </a:fontRef>
+        </p:style>
+      </p:cxnSp>
+      <p:sp>
+        <p:nvSpPr>
+          <p:cNvPr id="9" name="TextBox 8"/>
           <p:cNvSpPr txBox="1"/>
           <p:nvPr/>
         </p:nvSpPr>
         <p:spPr>
           <a:xfrm>
-            <a:off x="859536" y="4626864"/>
-            <a:ext cx="10479024" cy="1051560"/>
+            <a:off x="658368" y="5760720"/>
+            <a:ext cx="10881360" cy="548640"/>
           </a:xfrm>
           <a:prstGeom prst="rect">
             <a:avLst/>
@@ -12727,13 +13035,8 @@
           </a:bodyPr>
           <a:lstStyle/>
           <a:p>
-            <a:pPr>
-              <a:spcAft>
-                <a:spcPts val="700"/>
-              </a:spcAft>
-            </a:pPr>
-            <a:r>
-              <a:rPr sz="2300" b="1" i="0">
+            <a:r>
+              <a:rPr sz="1550" b="1" i="0">
                 <a:solidFill>
                   <a:srgbClr val="006E96"/>
                 </a:solidFill>
@@ -12746,7 +13049,7 @@
       </p:sp>
       <p:sp>
         <p:nvSpPr>
-          <p:cNvPr id="7" name="TextBox 6"/>
+          <p:cNvPr id="10" name="TextBox 9"/>
           <p:cNvSpPr txBox="1"/>
           <p:nvPr/>
         </p:nvSpPr>
@@ -12876,73 +13179,18 @@
       </p:sp>
       <p:sp>
         <p:nvSpPr>
-          <p:cNvPr id="4" name="TextBox 3"/>
-          <p:cNvSpPr txBox="1"/>
-          <p:nvPr/>
-        </p:nvSpPr>
-        <p:spPr>
-          <a:xfrm>
-            <a:off x="658368" y="1600200"/>
-            <a:ext cx="10881360" cy="2651760"/>
-          </a:xfrm>
-          <a:prstGeom prst="rect">
-            <a:avLst/>
-          </a:prstGeom>
-          <a:noFill/>
-        </p:spPr>
-        <p:txBody>
-          <a:bodyPr wrap="square">
-            <a:spAutoFit/>
-          </a:bodyPr>
-          <a:lstStyle/>
-          <a:p>
-            <a:pPr>
-              <a:spcAft>
-                <a:spcPts val="1200"/>
-              </a:spcAft>
-            </a:pPr>
-            <a:r>
-              <a:rPr sz="2000" b="0" i="0">
-                <a:solidFill>
-                  <a:srgbClr val="1A1A1A"/>
-                </a:solidFill>
-                <a:latin typeface="Arial"/>
-              </a:rPr>
-              <a:t>After Discovery you paste the findings back in. On a sector like Progressa's education system the AI scores the capabilities — register a learner low, certify a result high — scans for the four common gaps, and ranks them by impact and effort.</a:t>
-            </a:r>
-          </a:p>
-          <a:p>
-            <a:pPr>
-              <a:spcAft>
-                <a:spcPts val="1200"/>
-              </a:spcAft>
-            </a:pPr>
-            <a:r>
-              <a:rPr sz="2000" b="0" i="0">
-                <a:solidFill>
-                  <a:srgbClr val="1A1A1A"/>
-                </a:solidFill>
-                <a:latin typeface="Arial"/>
-              </a:rPr>
-              <a:t>And, crucially, it flags the gaps that involve a powerful body for honest handling.</a:t>
-            </a:r>
-          </a:p>
-        </p:txBody>
-      </p:sp>
-      <p:sp>
-        <p:nvSpPr>
-          <p:cNvPr id="5" name="Rounded Rectangle 4"/>
+          <p:cNvPr id="4" name="Rounded Rectangle 3"/>
           <p:cNvSpPr/>
           <p:nvPr/>
         </p:nvSpPr>
         <p:spPr>
           <a:xfrm>
-            <a:off x="658368" y="4434840"/>
-            <a:ext cx="10881360" cy="1325880"/>
+            <a:off x="658368" y="1645920"/>
+            <a:ext cx="3246120" cy="3840480"/>
           </a:xfrm>
           <a:prstGeom prst="roundRect">
             <a:avLst>
-              <a:gd name="adj" fmla="val 4500"/>
+              <a:gd name="adj" fmla="val 8000"/>
             </a:avLst>
           </a:prstGeom>
           <a:solidFill>
@@ -12968,23 +13216,354 @@
           </a:fontRef>
         </p:style>
         <p:txBody>
-          <a:bodyPr rtlCol="0" anchor="ctr"/>
+          <a:bodyPr rtlCol="0" anchor="t" lIns="128016" rIns="128016" tIns="91440" bIns="54864" wrap="square"/>
           <a:lstStyle/>
           <a:p>
-            <a:pPr algn="ctr"/>
+            <a:pPr algn="l">
+              <a:spcAft>
+                <a:spcPts val="300"/>
+              </a:spcAft>
+            </a:pPr>
+            <a:r>
+              <a:rPr sz="1200" b="1" i="0">
+                <a:solidFill>
+                  <a:srgbClr val="006E96"/>
+                </a:solidFill>
+                <a:latin typeface="Arial"/>
+              </a:rPr>
+              <a:t>YOU PASTE</a:t>
+            </a:r>
+          </a:p>
+          <a:p>
+            <a:pPr algn="l">
+              <a:spcAft>
+                <a:spcPts val="300"/>
+              </a:spcAft>
+            </a:pPr>
+            <a:r>
+              <a:rPr sz="1450" b="0" i="0">
+                <a:solidFill>
+                  <a:srgbClr val="1A1A1A"/>
+                </a:solidFill>
+                <a:latin typeface="Arial"/>
+              </a:rPr>
+              <a:t>Your Discovery findings.</a:t>
+            </a:r>
           </a:p>
         </p:txBody>
       </p:sp>
       <p:sp>
         <p:nvSpPr>
-          <p:cNvPr id="6" name="TextBox 5"/>
+          <p:cNvPr id="5" name="Rounded Rectangle 4"/>
+          <p:cNvSpPr/>
+          <p:nvPr/>
+        </p:nvSpPr>
+        <p:spPr>
+          <a:xfrm>
+            <a:off x="4471416" y="1645920"/>
+            <a:ext cx="3246120" cy="3840480"/>
+          </a:xfrm>
+          <a:prstGeom prst="roundRect">
+            <a:avLst>
+              <a:gd name="adj" fmla="val 8000"/>
+            </a:avLst>
+          </a:prstGeom>
+          <a:solidFill>
+            <a:srgbClr val="F2F2F2"/>
+          </a:solidFill>
+          <a:ln>
+            <a:noFill/>
+          </a:ln>
+          <a:effectLst/>
+        </p:spPr>
+        <p:style>
+          <a:lnRef idx="1">
+            <a:schemeClr val="accent1"/>
+          </a:lnRef>
+          <a:fillRef idx="3">
+            <a:schemeClr val="accent1"/>
+          </a:fillRef>
+          <a:effectRef idx="2">
+            <a:schemeClr val="accent1"/>
+          </a:effectRef>
+          <a:fontRef idx="minor">
+            <a:schemeClr val="lt1"/>
+          </a:fontRef>
+        </p:style>
+        <p:txBody>
+          <a:bodyPr rtlCol="0" anchor="t" lIns="128016" rIns="128016" tIns="91440" bIns="54864" wrap="square"/>
+          <a:lstStyle/>
+          <a:p>
+            <a:pPr algn="l">
+              <a:spcAft>
+                <a:spcPts val="300"/>
+              </a:spcAft>
+            </a:pPr>
+            <a:r>
+              <a:rPr sz="1200" b="1" i="0">
+                <a:solidFill>
+                  <a:srgbClr val="006E96"/>
+                </a:solidFill>
+                <a:latin typeface="Arial"/>
+              </a:rPr>
+              <a:t>THE AI RETURNS</a:t>
+            </a:r>
+          </a:p>
+          <a:p>
+            <a:pPr algn="l">
+              <a:spcAft>
+                <a:spcPts val="300"/>
+              </a:spcAft>
+            </a:pPr>
+            <a:r>
+              <a:rPr sz="1450" b="0" i="0">
+                <a:solidFill>
+                  <a:srgbClr val="1A1A1A"/>
+                </a:solidFill>
+                <a:latin typeface="Arial"/>
+              </a:rPr>
+              <a:t>Capability maturity scored.</a:t>
+            </a:r>
+          </a:p>
+          <a:p>
+            <a:pPr algn="l">
+              <a:spcAft>
+                <a:spcPts val="300"/>
+              </a:spcAft>
+            </a:pPr>
+            <a:r>
+              <a:rPr sz="1450" b="0" i="0">
+                <a:solidFill>
+                  <a:srgbClr val="1A1A1A"/>
+                </a:solidFill>
+                <a:latin typeface="Arial"/>
+              </a:rPr>
+              <a:t>The four common gaps, found.</a:t>
+            </a:r>
+          </a:p>
+          <a:p>
+            <a:pPr algn="l">
+              <a:spcAft>
+                <a:spcPts val="300"/>
+              </a:spcAft>
+            </a:pPr>
+            <a:r>
+              <a:rPr sz="1450" b="0" i="0">
+                <a:solidFill>
+                  <a:srgbClr val="1A1A1A"/>
+                </a:solidFill>
+                <a:latin typeface="Arial"/>
+              </a:rPr>
+              <a:t>Ranked by impact and effort.</a:t>
+            </a:r>
+          </a:p>
+          <a:p>
+            <a:pPr algn="l">
+              <a:spcAft>
+                <a:spcPts val="300"/>
+              </a:spcAft>
+            </a:pPr>
+            <a:r>
+              <a:rPr sz="1450" b="0" i="0">
+                <a:solidFill>
+                  <a:srgbClr val="1A1A1A"/>
+                </a:solidFill>
+                <a:latin typeface="Arial"/>
+              </a:rPr>
+              <a:t>Politically sensitive gaps flagged.</a:t>
+            </a:r>
+          </a:p>
+        </p:txBody>
+      </p:sp>
+      <p:sp>
+        <p:nvSpPr>
+          <p:cNvPr id="6" name="Rounded Rectangle 5"/>
+          <p:cNvSpPr/>
+          <p:nvPr/>
+        </p:nvSpPr>
+        <p:spPr>
+          <a:xfrm>
+            <a:off x="8284464" y="1645920"/>
+            <a:ext cx="3246120" cy="3840480"/>
+          </a:xfrm>
+          <a:prstGeom prst="roundRect">
+            <a:avLst>
+              <a:gd name="adj" fmla="val 8000"/>
+            </a:avLst>
+          </a:prstGeom>
+          <a:solidFill>
+            <a:srgbClr val="006E96"/>
+          </a:solidFill>
+          <a:ln>
+            <a:noFill/>
+          </a:ln>
+          <a:effectLst/>
+        </p:spPr>
+        <p:style>
+          <a:lnRef idx="1">
+            <a:schemeClr val="accent1"/>
+          </a:lnRef>
+          <a:fillRef idx="3">
+            <a:schemeClr val="accent1"/>
+          </a:fillRef>
+          <a:effectRef idx="2">
+            <a:schemeClr val="accent1"/>
+          </a:effectRef>
+          <a:fontRef idx="minor">
+            <a:schemeClr val="lt1"/>
+          </a:fontRef>
+        </p:style>
+        <p:txBody>
+          <a:bodyPr rtlCol="0" anchor="t" lIns="128016" rIns="128016" tIns="91440" bIns="54864" wrap="square"/>
+          <a:lstStyle/>
+          <a:p>
+            <a:pPr algn="l">
+              <a:spcAft>
+                <a:spcPts val="300"/>
+              </a:spcAft>
+            </a:pPr>
+            <a:r>
+              <a:rPr sz="1200" b="1" i="0">
+                <a:solidFill>
+                  <a:srgbClr val="FFFFFF"/>
+                </a:solidFill>
+                <a:latin typeface="Arial"/>
+              </a:rPr>
+              <a:t>YOU DECIDE</a:t>
+            </a:r>
+          </a:p>
+          <a:p>
+            <a:pPr algn="l">
+              <a:spcAft>
+                <a:spcPts val="300"/>
+              </a:spcAft>
+            </a:pPr>
+            <a:r>
+              <a:rPr sz="1450" b="0" i="0">
+                <a:solidFill>
+                  <a:srgbClr val="FFFFFF"/>
+                </a:solidFill>
+                <a:latin typeface="Arial"/>
+              </a:rPr>
+              <a:t>Check the ground truth.</a:t>
+            </a:r>
+          </a:p>
+          <a:p>
+            <a:pPr algn="l">
+              <a:spcAft>
+                <a:spcPts val="300"/>
+              </a:spcAft>
+            </a:pPr>
+            <a:r>
+              <a:rPr sz="1450" b="0" i="0">
+                <a:solidFill>
+                  <a:srgbClr val="FFFFFF"/>
+                </a:solidFill>
+                <a:latin typeface="Arial"/>
+              </a:rPr>
+              <a:t>Defend the ranking.</a:t>
+            </a:r>
+          </a:p>
+          <a:p>
+            <a:pPr algn="l">
+              <a:spcAft>
+                <a:spcPts val="300"/>
+              </a:spcAft>
+            </a:pPr>
+            <a:r>
+              <a:rPr sz="1450" b="0" i="0">
+                <a:solidFill>
+                  <a:srgbClr val="FFFFFF"/>
+                </a:solidFill>
+                <a:latin typeface="Arial"/>
+              </a:rPr>
+              <a:t>Decide how to handle the flagged gap.</a:t>
+            </a:r>
+          </a:p>
+        </p:txBody>
+      </p:sp>
+      <p:cxnSp>
+        <p:nvCxnSpPr>
+          <p:cNvPr id="7" name="Connector 6"/>
+          <p:cNvCxnSpPr/>
+          <p:nvPr/>
+        </p:nvCxnSpPr>
+        <p:spPr>
+          <a:xfrm>
+            <a:off x="3977639" y="3566160"/>
+            <a:ext cx="420625" cy="0"/>
+          </a:xfrm>
+          <a:prstGeom prst="line">
+            <a:avLst/>
+          </a:prstGeom>
+          <a:ln w="25400">
+            <a:solidFill>
+              <a:srgbClr val="006E96"/>
+            </a:solidFill>
+            <a:tailEnd type="triangle" w="med" len="med"/>
+          </a:ln>
+        </p:spPr>
+        <p:style>
+          <a:lnRef idx="2">
+            <a:schemeClr val="accent1"/>
+          </a:lnRef>
+          <a:fillRef idx="0">
+            <a:schemeClr val="accent1"/>
+          </a:fillRef>
+          <a:effectRef idx="1">
+            <a:schemeClr val="accent1"/>
+          </a:effectRef>
+          <a:fontRef idx="minor">
+            <a:schemeClr val="tx1"/>
+          </a:fontRef>
+        </p:style>
+      </p:cxnSp>
+      <p:cxnSp>
+        <p:nvCxnSpPr>
+          <p:cNvPr id="8" name="Connector 7"/>
+          <p:cNvCxnSpPr/>
+          <p:nvPr/>
+        </p:nvCxnSpPr>
+        <p:spPr>
+          <a:xfrm>
+            <a:off x="7790688" y="3566160"/>
+            <a:ext cx="420624" cy="0"/>
+          </a:xfrm>
+          <a:prstGeom prst="line">
+            <a:avLst/>
+          </a:prstGeom>
+          <a:ln w="25400">
+            <a:solidFill>
+              <a:srgbClr val="006E96"/>
+            </a:solidFill>
+            <a:tailEnd type="triangle" w="med" len="med"/>
+          </a:ln>
+        </p:spPr>
+        <p:style>
+          <a:lnRef idx="2">
+            <a:schemeClr val="accent1"/>
+          </a:lnRef>
+          <a:fillRef idx="0">
+            <a:schemeClr val="accent1"/>
+          </a:fillRef>
+          <a:effectRef idx="1">
+            <a:schemeClr val="accent1"/>
+          </a:effectRef>
+          <a:fontRef idx="minor">
+            <a:schemeClr val="tx1"/>
+          </a:fontRef>
+        </p:style>
+      </p:cxnSp>
+      <p:sp>
+        <p:nvSpPr>
+          <p:cNvPr id="9" name="TextBox 8"/>
           <p:cNvSpPr txBox="1"/>
           <p:nvPr/>
         </p:nvSpPr>
         <p:spPr>
           <a:xfrm>
-            <a:off x="859536" y="4626864"/>
-            <a:ext cx="10479024" cy="1051560"/>
+            <a:off x="658368" y="5760720"/>
+            <a:ext cx="10881360" cy="548640"/>
           </a:xfrm>
           <a:prstGeom prst="rect">
             <a:avLst/>
@@ -12997,13 +13576,8 @@
           </a:bodyPr>
           <a:lstStyle/>
           <a:p>
-            <a:pPr>
-              <a:spcAft>
-                <a:spcPts val="700"/>
-              </a:spcAft>
-            </a:pPr>
-            <a:r>
-              <a:rPr sz="2300" b="1" i="0">
+            <a:r>
+              <a:rPr sz="1550" b="1" i="0">
                 <a:solidFill>
                   <a:srgbClr val="006E96"/>
                 </a:solidFill>
@@ -13016,7 +13590,7 @@
       </p:sp>
       <p:sp>
         <p:nvSpPr>
-          <p:cNvPr id="7" name="TextBox 6"/>
+          <p:cNvPr id="10" name="TextBox 9"/>
           <p:cNvSpPr txBox="1"/>
           <p:nvPr/>
         </p:nvSpPr>
@@ -13583,7 +14157,7 @@
         <p:spPr>
           <a:xfrm>
             <a:off x="658368" y="1600200"/>
-            <a:ext cx="10881360" cy="2651760"/>
+            <a:ext cx="10881360" cy="1984248"/>
           </a:xfrm>
           <a:prstGeom prst="rect">
             <a:avLst/>
@@ -13637,7 +14211,7 @@
         </p:nvSpPr>
         <p:spPr>
           <a:xfrm>
-            <a:off x="658368" y="4434840"/>
+            <a:off x="658368" y="3767328"/>
             <a:ext cx="10881360" cy="1325880"/>
           </a:xfrm>
           <a:prstGeom prst="roundRect">
@@ -13683,7 +14257,7 @@
         </p:nvSpPr>
         <p:spPr>
           <a:xfrm>
-            <a:off x="859536" y="4626864"/>
+            <a:off x="859536" y="3959352"/>
             <a:ext cx="10479024" cy="1051560"/>
           </a:xfrm>
           <a:prstGeom prst="rect">

--- a/10-Knowledge-Products/KP1-GEA/videos/module_5/en/decks/KP1_M5_5.2_Deck_v0.1.pptx
+++ b/10-Knowledge-Products/KP1-GEA/videos/module_5/en/decks/KP1_M5_5.2_Deck_v0.1.pptx
@@ -933,13 +933,19 @@
           <a:lstStyle/>
           <a:p>
             <a:r>
-              <a:t>VO, slide 1: The first play is the one you will use most: drafting the artefacts of Discovery and Assess. These are the slowest to start from a blank page — the capture template, and the ranked gap analysis. AI gets you from blank page to strong draft in minutes. Here is how it goes on a real sector.</a:t>
+              <a:t>VO, slide 1: If the evidence shows the pattern works, it also shows, just as clearly, why programmes fail. And the striking thing is that the failures are almost never technical. The technology works. What kills these programmes is organisational — and because it is organisational, you can design around it from the start. Here is what the record says, on both sides.</a:t>
             </a:r>
           </a:p>
           <a:p/>
           <a:p>
             <a:r>
-              <a:t>On screen: the play's copy-paste prompt is not shown on a slide — it ships in the video description so the viewer can run it on the other half of the screen.</a:t>
+              <a:t>Retrieval prompt — ask before playing on: name the ways a programme like this dies. Are any of them technical? Answer on the next two slides.</a:t>
+            </a:r>
+          </a:p>
+          <a:p/>
+          <a:p>
+            <a:r>
+              <a:t>On screen: the copy-paste prompt is not shown on a slide — it ships in the video description so the viewer can draft the artefact on the other half of the screen.</a:t>
             </a:r>
           </a:p>
         </p:txBody>
@@ -1009,7 +1015,7 @@
           <a:lstStyle/>
           <a:p>
             <a:r>
-              <a:t>VO: Step one, before the interviews. You paste what you know about a body — its mandate, its known systems, its registries. The AI returns a four-layer capture template: the right questions to ask per layer, a reminder to describe and not recommend, and a column to record where each answer came from. You walk into the Discovery interview with a structured sheet instead of a blank notebook. The template is a starting structure — you still ask the questions and record the real answers.</a:t>
+              <a:t>VO: Start with what works, because you will build these in deliberately. A small permanent team, protected from being pulled onto other work. A published framework that agencies adopt because it helps them, not because it is forced. Governance that can actually say no to a project that would fragment the architecture. And funding sustained across years, not granted annually and withdrawn when priorities shift. Where these four hold, the programmes deliver. Where any one is missing, they wobble.</a:t>
             </a:r>
           </a:p>
         </p:txBody>
@@ -1079,7 +1085,13 @@
           <a:lstStyle/>
           <a:p>
             <a:r>
-              <a:t>VO: Step two, after Discovery. You paste the findings back in and ask for a ranked gap analysis. On a sector like Progressa's education system, the AI scores the capabilities — register a learner low, certify a result high — scans for the four common gaps, ranks them by impact and effort, and, crucially, flags the gaps that involve a powerful body for honest handling. In minutes you have the skeleton of the assessment that would otherwise take a week to structure.</a:t>
+              <a:t>VO: Now the failures, because forewarned is forearmed. The team gets pulled onto the flagship project that is in trouble, and the architecture work stops. The minister or director-general who championed it moves on, and the successor has their own priorities. The governance board, under delivery pressure, lets one powerful project through, then another, until its "no" means nothing. And the funding, never secured as a multi-year commitment, quietly becomes an annual favour that one budget cycle removes. None of these is dramatic. Each is a slow fade, usually in the second year.</a:t>
+            </a:r>
+          </a:p>
+          <a:p/>
+          <a:p>
+            <a:r>
+              <a:t>Production cue: this slide and the next answer the retrieval prompt set on the title slide.</a:t>
             </a:r>
           </a:p>
         </p:txBody>
@@ -1149,7 +1161,13 @@
           <a:lstStyle/>
           <a:p>
             <a:r>
-              <a:t>VO: Be clear about the division of labour. The AI is good at structure and completeness — it will not forget to score a capability or to check for duplicate registries. What it cannot do is know the ground truth. It scores what your notes say, not what is real. It cannot feel the political weight of the gap that a powerful programme will fight to keep. And it cannot tell whether a fact in your notes is actually true. The structure is the AI's; the truth and the judgement are yours.</a:t>
+              <a:t>VO: Notice what every one of those killers has in common. Not one is about technology. They are about people, authority and money — protecting the team, securing the mandate, defending the governance, locking in the funding. And that is the good news, because those are exactly the things you, as the one making the case upward, can influence. The chief architect cannot protect their own team or secure their own five-year budget. Only the strategist who commissioned the work can. The failures are organisational, which means they are yours to prevent.</a:t>
+            </a:r>
+          </a:p>
+          <a:p/>
+          <a:p>
+            <a:r>
+              <a:t>Production cue: the pivotal reframe of this video, and it closes the retrieval prompt. Hold it a beat longer.</a:t>
             </a:r>
           </a:p>
         </p:txBody>
@@ -1219,13 +1237,7 @@
           <a:lstStyle/>
           <a:p>
             <a:r>
-              <a:t>VO: Of everything this play produces, the honesty flag matters most. The AI will mark the duplicate learner list that a powerful programme owns as a politically sensitive gap. But it cannot decide how to handle it — that is your call, made with the decision-maker, not softened to avoid a fight. The play gives you the flag; you provide the courage. An assessment that flatters the current state to keep the peace fails quietly, a year later, when the flagship still does not exist.</a:t>
-            </a:r>
-          </a:p>
-          <a:p/>
-          <a:p>
-            <a:r>
-              <a:t>Production cue: the pivotal slide of this video. Hold it a beat longer.</a:t>
+              <a:t>VO: So design for the second year now, while you have the minister's attention. Get the team's protection in writing. Make the governance mandate legal, not just a memo. Secure a multi-year funding envelope, not an annual line. And plan to re-commit all of it when the sponsor changes, because the next minister will not feel bound by the last one's promises. These are not afterthoughts to add if the programme survives. They are how it survives. Build them in at the start, and you have designed out the four most common ways these programmes die.</a:t>
             </a:r>
           </a:p>
         </p:txBody>
@@ -1295,7 +1307,7 @@
           <a:lstStyle/>
           <a:p>
             <a:r>
-              <a:t>VO: So the first play gets you from blank page to a structured capture template and a ranked gap analysis fast. Use it to skip the slow part — the structuring — and spend your time on the part only you can do: getting the truth right, and ranking the gaps honestly, including the ones that are uncomfortable to name.</a:t>
+              <a:t>VO: So the evidence gives you two lists. What to build in — a protected team, an adopted framework, binding governance, sustained funding. And what to design out — the four organisational failures that quietly kill these programmes in their second year. Brief your minister on both. A programme designed to survive its own second year is the one that delivers.</a:t>
             </a:r>
           </a:p>
         </p:txBody>
@@ -11710,7 +11722,7 @@
                 </a:solidFill>
                 <a:latin typeface="Arial"/>
               </a:rPr>
-              <a:t>5.2 — Play 1 — Draft your Discovery and Assess artefacts</a:t>
+              <a:t>5.2 — What the evidence says works — and what quietly kills these programmes</a:t>
             </a:r>
           </a:p>
         </p:txBody>
@@ -11826,7 +11838,7 @@
                 </a:solidFill>
                 <a:latin typeface="Arial"/>
               </a:rPr>
-              <a:t>The first play turns your raw Discovery notes into a structured capture template and then a ranked gap analysis — the two hardest-to-start artefacts of the assessment — in a fraction of the time, with the politics flagged for you to handle honestly.</a:t>
+              <a:t>The public record is consistent about what makes these programmes succeed and what kills them — and the killers are organisational, not technical. Knowing both lets you design your programme to last, and brief your minister on the real risks.</a:t>
             </a:r>
           </a:p>
         </p:txBody>
@@ -11923,7 +11935,7 @@
                 </a:solidFill>
                 <a:latin typeface="Arial"/>
               </a:rPr>
-              <a:t>Chief architect · senior architect · sector ICT lead</a:t>
+              <a:t>Director-general · head of a sectoral ICT unit · technical secretary</a:t>
             </a:r>
           </a:p>
         </p:txBody>
@@ -12001,7 +12013,7 @@
                 </a:solidFill>
                 <a:latin typeface="Arial"/>
               </a:rPr>
-              <a:t>THE FIVE PLAYS THIS MODULE TEACHES</a:t>
+              <a:t>THE CASE YOU CARRY INTO THE ROOM</a:t>
             </a:r>
           </a:p>
         </p:txBody>
@@ -12056,7 +12068,7 @@
                 </a:solidFill>
                 <a:latin typeface="Arial"/>
               </a:rPr>
-              <a:t>Play 1 — Discovery and Assess</a:t>
+              <a:t>Proven — four real governments</a:t>
             </a:r>
           </a:p>
         </p:txBody>
@@ -12111,7 +12123,7 @@
                 </a:solidFill>
                 <a:latin typeface="Arial"/>
               </a:rPr>
-              <a:t>Play 2 — the re-use business case</a:t>
+              <a:t>Portable — sector after sector</a:t>
             </a:r>
           </a:p>
         </p:txBody>
@@ -12166,7 +12178,7 @@
                 </a:solidFill>
                 <a:latin typeface="Arial"/>
               </a:rPr>
-              <a:t>Play 3 — minister and architects</a:t>
+              <a:t>The commitment — the one page</a:t>
             </a:r>
           </a:p>
         </p:txBody>
@@ -12221,7 +12233,7 @@
                 </a:solidFill>
                 <a:latin typeface="Arial"/>
               </a:rPr>
-              <a:t>Play 4 — the governance artefacts</a:t>
+              <a:t>The capability — your own people</a:t>
             </a:r>
           </a:p>
         </p:txBody>
@@ -12276,7 +12288,7 @@
                 </a:solidFill>
                 <a:latin typeface="Arial"/>
               </a:rPr>
-              <a:t>Play 5 — comparators and transfer</a:t>
+              <a:t>Necessary now, not just useful</a:t>
             </a:r>
           </a:p>
         </p:txBody>
@@ -12310,7 +12322,7 @@
                 </a:solidFill>
                 <a:latin typeface="Arial"/>
               </a:rPr>
-              <a:t>4-part prompt · 5 plays · 4 safeguards · you decide, the AI drafts</a:t>
+              <a:t>4 governments · 4 killers to design out · 1 page for the minister</a:t>
             </a:r>
           </a:p>
         </p:txBody>
@@ -12435,7 +12447,7 @@
                 </a:solidFill>
                 <a:latin typeface="Arial"/>
               </a:rPr>
-              <a:t>Play 1 — Draft your Discovery and Assess artefacts</a:t>
+              <a:t>What the evidence says works — and what quietly kills these programmes</a:t>
             </a:r>
           </a:p>
         </p:txBody>
@@ -12469,7 +12481,7 @@
                 </a:solidFill>
                 <a:latin typeface="Arial"/>
               </a:rPr>
-              <a:t>The first play turns your raw Discovery notes into a structured capture template and then a ranked gap analysis — the two hardest-to-start artefacts of the assessment — in a fraction of the time, with the politics flagged for you to handle honestly.</a:t>
+              <a:t>The public record is consistent about what makes these programmes succeed and what kills them — and the killers are organisational, not technical. Knowing both lets you design your programme to last, and brief your minister on the real risks.</a:t>
             </a:r>
           </a:p>
         </p:txBody>
@@ -12599,29 +12611,82 @@
                 </a:solidFill>
                 <a:latin typeface="Arial"/>
               </a:rPr>
-              <a:t>Step 1 — walk in with a structured sheet, not a blank notebook</a:t>
-            </a:r>
-          </a:p>
-        </p:txBody>
-      </p:sp>
-      <p:sp>
-        <p:nvSpPr>
-          <p:cNvPr id="4" name="Rounded Rectangle 3"/>
+              <a:t>Four things make them work — build all four in deliberately</a:t>
+            </a:r>
+          </a:p>
+        </p:txBody>
+      </p:sp>
+      <p:sp>
+        <p:nvSpPr>
+          <p:cNvPr id="4" name="TextBox 3"/>
+          <p:cNvSpPr txBox="1"/>
+          <p:nvPr/>
+        </p:nvSpPr>
+        <p:spPr>
+          <a:xfrm>
+            <a:off x="658368" y="1463040"/>
+            <a:ext cx="10984687" cy="1028699"/>
+          </a:xfrm>
+          <a:prstGeom prst="rect">
+            <a:avLst/>
+          </a:prstGeom>
+          <a:noFill/>
+        </p:spPr>
+        <p:txBody>
+          <a:bodyPr wrap="square">
+            <a:spAutoFit/>
+          </a:bodyPr>
+          <a:lstStyle/>
+          <a:p>
+            <a:pPr>
+              <a:spcAft>
+                <a:spcPts val="300"/>
+              </a:spcAft>
+            </a:pPr>
+            <a:r>
+              <a:rPr sz="1900" b="1" i="0">
+                <a:solidFill>
+                  <a:srgbClr val="1A1A1A"/>
+                </a:solidFill>
+                <a:latin typeface="Arial"/>
+              </a:rPr>
+              <a:t>A small permanent team, protected</a:t>
+            </a:r>
+          </a:p>
+          <a:p>
+            <a:pPr>
+              <a:spcAft>
+                <a:spcPts val="300"/>
+              </a:spcAft>
+            </a:pPr>
+            <a:r>
+              <a:rPr sz="1550" b="0" i="0">
+                <a:solidFill>
+                  <a:srgbClr val="595959"/>
+                </a:solidFill>
+                <a:latin typeface="Arial"/>
+              </a:rPr>
+              <a:t>Not pulled onto other work when something urgent appears.</a:t>
+            </a:r>
+          </a:p>
+        </p:txBody>
+      </p:sp>
+      <p:sp>
+        <p:nvSpPr>
+          <p:cNvPr id="5" name="Rectangle 4"/>
           <p:cNvSpPr/>
           <p:nvPr/>
         </p:nvSpPr>
         <p:spPr>
           <a:xfrm>
-            <a:off x="658368" y="1645920"/>
-            <a:ext cx="3246120" cy="3840480"/>
-          </a:xfrm>
-          <a:prstGeom prst="roundRect">
-            <a:avLst>
-              <a:gd name="adj" fmla="val 8000"/>
-            </a:avLst>
+            <a:off x="621792" y="2496312"/>
+            <a:ext cx="10881360" cy="12700"/>
+          </a:xfrm>
+          <a:prstGeom prst="rect">
+            <a:avLst/>
           </a:prstGeom>
           <a:solidFill>
-            <a:srgbClr val="E5F5FB"/>
+            <a:srgbClr val="DDECF4"/>
           </a:solidFill>
           <a:ln>
             <a:noFill/>
@@ -12643,92 +12708,84 @@
           </a:fontRef>
         </p:style>
         <p:txBody>
-          <a:bodyPr rtlCol="0" anchor="t" lIns="128016" rIns="128016" tIns="91440" bIns="54864" wrap="square"/>
+          <a:bodyPr rtlCol="0" anchor="ctr"/>
           <a:lstStyle/>
           <a:p>
-            <a:pPr algn="l">
+            <a:pPr algn="ctr"/>
+          </a:p>
+        </p:txBody>
+      </p:sp>
+      <p:sp>
+        <p:nvSpPr>
+          <p:cNvPr id="6" name="TextBox 5"/>
+          <p:cNvSpPr txBox="1"/>
+          <p:nvPr/>
+        </p:nvSpPr>
+        <p:spPr>
+          <a:xfrm>
+            <a:off x="658368" y="2537460"/>
+            <a:ext cx="10984687" cy="1028699"/>
+          </a:xfrm>
+          <a:prstGeom prst="rect">
+            <a:avLst/>
+          </a:prstGeom>
+          <a:noFill/>
+        </p:spPr>
+        <p:txBody>
+          <a:bodyPr wrap="square">
+            <a:spAutoFit/>
+          </a:bodyPr>
+          <a:lstStyle/>
+          <a:p>
+            <a:pPr>
               <a:spcAft>
                 <a:spcPts val="300"/>
               </a:spcAft>
             </a:pPr>
             <a:r>
-              <a:rPr sz="1200" b="1" i="0">
-                <a:solidFill>
-                  <a:srgbClr val="006E96"/>
-                </a:solidFill>
-                <a:latin typeface="Arial"/>
-              </a:rPr>
-              <a:t>YOU PASTE</a:t>
-            </a:r>
-          </a:p>
-          <a:p>
-            <a:pPr algn="l">
-              <a:spcAft>
-                <a:spcPts val="300"/>
-              </a:spcAft>
-            </a:pPr>
-            <a:r>
-              <a:rPr sz="1450" b="0" i="0">
+              <a:rPr sz="1900" b="1" i="0">
                 <a:solidFill>
                   <a:srgbClr val="1A1A1A"/>
                 </a:solidFill>
                 <a:latin typeface="Arial"/>
               </a:rPr>
-              <a:t>A body's mandate.</a:t>
-            </a:r>
-          </a:p>
-          <a:p>
-            <a:pPr algn="l">
+              <a:t>A framework agencies adopt, rather than are forced into</a:t>
+            </a:r>
+          </a:p>
+          <a:p>
+            <a:pPr>
               <a:spcAft>
                 <a:spcPts val="300"/>
               </a:spcAft>
             </a:pPr>
             <a:r>
-              <a:rPr sz="1450" b="0" i="0">
+              <a:rPr sz="1550" b="0" i="0">
                 <a:solidFill>
-                  <a:srgbClr val="1A1A1A"/>
+                  <a:srgbClr val="595959"/>
                 </a:solidFill>
                 <a:latin typeface="Arial"/>
               </a:rPr>
-              <a:t>Its known systems.</a:t>
-            </a:r>
-          </a:p>
-          <a:p>
-            <a:pPr algn="l">
-              <a:spcAft>
-                <a:spcPts val="300"/>
-              </a:spcAft>
-            </a:pPr>
-            <a:r>
-              <a:rPr sz="1450" b="0" i="0">
-                <a:solidFill>
-                  <a:srgbClr val="1A1A1A"/>
-                </a:solidFill>
-                <a:latin typeface="Arial"/>
-              </a:rPr>
-              <a:t>Its registries.</a:t>
-            </a:r>
-          </a:p>
-        </p:txBody>
-      </p:sp>
-      <p:sp>
-        <p:nvSpPr>
-          <p:cNvPr id="5" name="Rounded Rectangle 4"/>
+              <a:t>They use it because it helps them.</a:t>
+            </a:r>
+          </a:p>
+        </p:txBody>
+      </p:sp>
+      <p:sp>
+        <p:nvSpPr>
+          <p:cNvPr id="7" name="Rectangle 6"/>
           <p:cNvSpPr/>
           <p:nvPr/>
         </p:nvSpPr>
         <p:spPr>
           <a:xfrm>
-            <a:off x="4471416" y="1645920"/>
-            <a:ext cx="3246120" cy="3840480"/>
-          </a:xfrm>
-          <a:prstGeom prst="roundRect">
-            <a:avLst>
-              <a:gd name="adj" fmla="val 8000"/>
-            </a:avLst>
+            <a:off x="621792" y="3570732"/>
+            <a:ext cx="10881360" cy="12700"/>
+          </a:xfrm>
+          <a:prstGeom prst="rect">
+            <a:avLst/>
           </a:prstGeom>
           <a:solidFill>
-            <a:srgbClr val="F2F2F2"/>
+            <a:srgbClr val="DDECF4"/>
           </a:solidFill>
           <a:ln>
             <a:noFill/>
@@ -12750,108 +12807,84 @@
           </a:fontRef>
         </p:style>
         <p:txBody>
-          <a:bodyPr rtlCol="0" anchor="t" lIns="128016" rIns="128016" tIns="91440" bIns="54864" wrap="square"/>
+          <a:bodyPr rtlCol="0" anchor="ctr"/>
           <a:lstStyle/>
           <a:p>
-            <a:pPr algn="l">
+            <a:pPr algn="ctr"/>
+          </a:p>
+        </p:txBody>
+      </p:sp>
+      <p:sp>
+        <p:nvSpPr>
+          <p:cNvPr id="8" name="TextBox 7"/>
+          <p:cNvSpPr txBox="1"/>
+          <p:nvPr/>
+        </p:nvSpPr>
+        <p:spPr>
+          <a:xfrm>
+            <a:off x="658368" y="3611879"/>
+            <a:ext cx="10984687" cy="1028699"/>
+          </a:xfrm>
+          <a:prstGeom prst="rect">
+            <a:avLst/>
+          </a:prstGeom>
+          <a:noFill/>
+        </p:spPr>
+        <p:txBody>
+          <a:bodyPr wrap="square">
+            <a:spAutoFit/>
+          </a:bodyPr>
+          <a:lstStyle/>
+          <a:p>
+            <a:pPr>
               <a:spcAft>
                 <a:spcPts val="300"/>
               </a:spcAft>
             </a:pPr>
             <a:r>
-              <a:rPr sz="1200" b="1" i="0">
-                <a:solidFill>
-                  <a:srgbClr val="006E96"/>
-                </a:solidFill>
-                <a:latin typeface="Arial"/>
-              </a:rPr>
-              <a:t>THE AI RETURNS</a:t>
-            </a:r>
-          </a:p>
-          <a:p>
-            <a:pPr algn="l">
-              <a:spcAft>
-                <a:spcPts val="300"/>
-              </a:spcAft>
-            </a:pPr>
-            <a:r>
-              <a:rPr sz="1450" b="0" i="0">
+              <a:rPr sz="1900" b="1" i="0">
                 <a:solidFill>
                   <a:srgbClr val="1A1A1A"/>
                 </a:solidFill>
                 <a:latin typeface="Arial"/>
               </a:rPr>
-              <a:t>A four-layer capture template.</a:t>
-            </a:r>
-          </a:p>
-          <a:p>
-            <a:pPr algn="l">
+              <a:t>Governance that can actually say no</a:t>
+            </a:r>
+          </a:p>
+          <a:p>
+            <a:pPr>
               <a:spcAft>
                 <a:spcPts val="300"/>
               </a:spcAft>
             </a:pPr>
             <a:r>
-              <a:rPr sz="1450" b="0" i="0">
+              <a:rPr sz="1550" b="0" i="0">
                 <a:solidFill>
-                  <a:srgbClr val="1A1A1A"/>
+                  <a:srgbClr val="595959"/>
                 </a:solidFill>
                 <a:latin typeface="Arial"/>
               </a:rPr>
-              <a:t>The right questions per layer.</a:t>
-            </a:r>
-          </a:p>
-          <a:p>
-            <a:pPr algn="l">
-              <a:spcAft>
-                <a:spcPts val="300"/>
-              </a:spcAft>
-            </a:pPr>
-            <a:r>
-              <a:rPr sz="1450" b="0" i="0">
-                <a:solidFill>
-                  <a:srgbClr val="1A1A1A"/>
-                </a:solidFill>
-                <a:latin typeface="Arial"/>
-              </a:rPr>
-              <a:t>A describe-don't-recommend reminder.</a:t>
-            </a:r>
-          </a:p>
-          <a:p>
-            <a:pPr algn="l">
-              <a:spcAft>
-                <a:spcPts val="300"/>
-              </a:spcAft>
-            </a:pPr>
-            <a:r>
-              <a:rPr sz="1450" b="0" i="0">
-                <a:solidFill>
-                  <a:srgbClr val="1A1A1A"/>
-                </a:solidFill>
-                <a:latin typeface="Arial"/>
-              </a:rPr>
-              <a:t>A column for where each answer came from.</a:t>
-            </a:r>
-          </a:p>
-        </p:txBody>
-      </p:sp>
-      <p:sp>
-        <p:nvSpPr>
-          <p:cNvPr id="6" name="Rounded Rectangle 5"/>
+              <a:t>To a project that would fragment the architecture.</a:t>
+            </a:r>
+          </a:p>
+        </p:txBody>
+      </p:sp>
+      <p:sp>
+        <p:nvSpPr>
+          <p:cNvPr id="9" name="Rectangle 8"/>
           <p:cNvSpPr/>
           <p:nvPr/>
         </p:nvSpPr>
         <p:spPr>
           <a:xfrm>
-            <a:off x="8284464" y="1645920"/>
-            <a:ext cx="3246120" cy="3840480"/>
-          </a:xfrm>
-          <a:prstGeom prst="roundRect">
-            <a:avLst>
-              <a:gd name="adj" fmla="val 8000"/>
-            </a:avLst>
+            <a:off x="621792" y="4645152"/>
+            <a:ext cx="10881360" cy="12700"/>
+          </a:xfrm>
+          <a:prstGeom prst="rect">
+            <a:avLst/>
           </a:prstGeom>
           <a:solidFill>
-            <a:srgbClr val="006E96"/>
+            <a:srgbClr val="DDECF4"/>
           </a:solidFill>
           <a:ln>
             <a:noFill/>
@@ -12873,155 +12906,77 @@
           </a:fontRef>
         </p:style>
         <p:txBody>
-          <a:bodyPr rtlCol="0" anchor="t" lIns="128016" rIns="128016" tIns="91440" bIns="54864" wrap="square"/>
+          <a:bodyPr rtlCol="0" anchor="ctr"/>
           <a:lstStyle/>
           <a:p>
-            <a:pPr algn="l">
+            <a:pPr algn="ctr"/>
+          </a:p>
+        </p:txBody>
+      </p:sp>
+      <p:sp>
+        <p:nvSpPr>
+          <p:cNvPr id="10" name="TextBox 9"/>
+          <p:cNvSpPr txBox="1"/>
+          <p:nvPr/>
+        </p:nvSpPr>
+        <p:spPr>
+          <a:xfrm>
+            <a:off x="658368" y="4686300"/>
+            <a:ext cx="10984687" cy="1028699"/>
+          </a:xfrm>
+          <a:prstGeom prst="rect">
+            <a:avLst/>
+          </a:prstGeom>
+          <a:noFill/>
+        </p:spPr>
+        <p:txBody>
+          <a:bodyPr wrap="square">
+            <a:spAutoFit/>
+          </a:bodyPr>
+          <a:lstStyle/>
+          <a:p>
+            <a:pPr>
               <a:spcAft>
                 <a:spcPts val="300"/>
               </a:spcAft>
             </a:pPr>
             <a:r>
-              <a:rPr sz="1200" b="1" i="0">
+              <a:rPr sz="1900" b="1" i="0">
                 <a:solidFill>
-                  <a:srgbClr val="FFFFFF"/>
+                  <a:srgbClr val="1A1A1A"/>
                 </a:solidFill>
                 <a:latin typeface="Arial"/>
               </a:rPr>
-              <a:t>YOU DECIDE</a:t>
-            </a:r>
-          </a:p>
-          <a:p>
-            <a:pPr algn="l">
+              <a:t>Funding sustained across years</a:t>
+            </a:r>
+          </a:p>
+          <a:p>
+            <a:pPr>
               <a:spcAft>
                 <a:spcPts val="300"/>
               </a:spcAft>
             </a:pPr>
             <a:r>
-              <a:rPr sz="1450" b="0" i="0">
+              <a:rPr sz="1550" b="0" i="0">
                 <a:solidFill>
-                  <a:srgbClr val="FFFFFF"/>
+                  <a:srgbClr val="595959"/>
                 </a:solidFill>
                 <a:latin typeface="Arial"/>
               </a:rPr>
-              <a:t>Ask the questions.</a:t>
-            </a:r>
-          </a:p>
-          <a:p>
-            <a:pPr algn="l">
-              <a:spcAft>
-                <a:spcPts val="300"/>
-              </a:spcAft>
-            </a:pPr>
-            <a:r>
-              <a:rPr sz="1450" b="0" i="0">
-                <a:solidFill>
-                  <a:srgbClr val="FFFFFF"/>
-                </a:solidFill>
-                <a:latin typeface="Arial"/>
-              </a:rPr>
-              <a:t>Record the real answers.</a:t>
-            </a:r>
-          </a:p>
-          <a:p>
-            <a:pPr algn="l">
-              <a:spcAft>
-                <a:spcPts val="300"/>
-              </a:spcAft>
-            </a:pPr>
-            <a:r>
-              <a:rPr sz="1450" b="0" i="0">
-                <a:solidFill>
-                  <a:srgbClr val="FFFFFF"/>
-                </a:solidFill>
-                <a:latin typeface="Arial"/>
-              </a:rPr>
-              <a:t>The template is a structure, never the findings.</a:t>
-            </a:r>
-          </a:p>
-        </p:txBody>
-      </p:sp>
-      <p:cxnSp>
-        <p:nvCxnSpPr>
-          <p:cNvPr id="7" name="Connector 6"/>
-          <p:cNvCxnSpPr/>
-          <p:nvPr/>
-        </p:nvCxnSpPr>
-        <p:spPr>
-          <a:xfrm>
-            <a:off x="3977639" y="3566160"/>
-            <a:ext cx="420625" cy="0"/>
-          </a:xfrm>
-          <a:prstGeom prst="line">
-            <a:avLst/>
-          </a:prstGeom>
-          <a:ln w="25400">
-            <a:solidFill>
-              <a:srgbClr val="006E96"/>
-            </a:solidFill>
-            <a:tailEnd type="triangle" w="med" len="med"/>
-          </a:ln>
-        </p:spPr>
-        <p:style>
-          <a:lnRef idx="2">
-            <a:schemeClr val="accent1"/>
-          </a:lnRef>
-          <a:fillRef idx="0">
-            <a:schemeClr val="accent1"/>
-          </a:fillRef>
-          <a:effectRef idx="1">
-            <a:schemeClr val="accent1"/>
-          </a:effectRef>
-          <a:fontRef idx="minor">
-            <a:schemeClr val="tx1"/>
-          </a:fontRef>
-        </p:style>
-      </p:cxnSp>
-      <p:cxnSp>
-        <p:nvCxnSpPr>
-          <p:cNvPr id="8" name="Connector 7"/>
-          <p:cNvCxnSpPr/>
-          <p:nvPr/>
-        </p:nvCxnSpPr>
-        <p:spPr>
-          <a:xfrm>
-            <a:off x="7790688" y="3566160"/>
-            <a:ext cx="420624" cy="0"/>
-          </a:xfrm>
-          <a:prstGeom prst="line">
-            <a:avLst/>
-          </a:prstGeom>
-          <a:ln w="25400">
-            <a:solidFill>
-              <a:srgbClr val="006E96"/>
-            </a:solidFill>
-            <a:tailEnd type="triangle" w="med" len="med"/>
-          </a:ln>
-        </p:spPr>
-        <p:style>
-          <a:lnRef idx="2">
-            <a:schemeClr val="accent1"/>
-          </a:lnRef>
-          <a:fillRef idx="0">
-            <a:schemeClr val="accent1"/>
-          </a:fillRef>
-          <a:effectRef idx="1">
-            <a:schemeClr val="accent1"/>
-          </a:effectRef>
-          <a:fontRef idx="minor">
-            <a:schemeClr val="tx1"/>
-          </a:fontRef>
-        </p:style>
-      </p:cxnSp>
-      <p:sp>
-        <p:nvSpPr>
-          <p:cNvPr id="9" name="TextBox 8"/>
+              <a:t>Not granted annually and withdrawn when priorities shift.</a:t>
+            </a:r>
+          </a:p>
+        </p:txBody>
+      </p:sp>
+      <p:sp>
+        <p:nvSpPr>
+          <p:cNvPr id="11" name="TextBox 10"/>
           <p:cNvSpPr txBox="1"/>
           <p:nvPr/>
         </p:nvSpPr>
         <p:spPr>
           <a:xfrm>
-            <a:off x="658368" y="5760720"/>
+            <a:off x="658368" y="5870448"/>
             <a:ext cx="10881360" cy="548640"/>
           </a:xfrm>
           <a:prstGeom prst="rect">
@@ -13042,14 +12997,14 @@
                 </a:solidFill>
                 <a:latin typeface="Arial"/>
               </a:rPr>
-              <a:t>Blank page to structured sheet, before the first interview.</a:t>
-            </a:r>
-          </a:p>
-        </p:txBody>
-      </p:sp>
-      <p:sp>
-        <p:nvSpPr>
-          <p:cNvPr id="10" name="TextBox 9"/>
+              <a:t>Where all four hold, the programmes deliver. Where any one is missing, they wobble.</a:t>
+            </a:r>
+          </a:p>
+        </p:txBody>
+      </p:sp>
+      <p:sp>
+        <p:nvSpPr>
+          <p:cNvPr id="12" name="TextBox 11"/>
           <p:cNvSpPr txBox="1"/>
           <p:nvPr/>
         </p:nvSpPr>
@@ -13076,7 +13031,7 @@
                 </a:solidFill>
                 <a:latin typeface="Arial"/>
               </a:rPr>
-              <a:t>5.2 · Play 1 — Draft your Discovery and Assess artefacts</a:t>
+              <a:t>5.2 · What the evidence says works — and what quietly kills these programmes</a:t>
             </a:r>
           </a:p>
         </p:txBody>
@@ -13172,29 +13127,27 @@
                 </a:solidFill>
                 <a:latin typeface="Arial"/>
               </a:rPr>
-              <a:t>Step 2 — a ranked gap analysis in minutes instead of a week</a:t>
-            </a:r>
-          </a:p>
-        </p:txBody>
-      </p:sp>
-      <p:sp>
-        <p:nvSpPr>
-          <p:cNvPr id="4" name="Rounded Rectangle 3"/>
+              <a:t>Four things quietly kill them — usually in the second year</a:t>
+            </a:r>
+          </a:p>
+        </p:txBody>
+      </p:sp>
+      <p:sp>
+        <p:nvSpPr>
+          <p:cNvPr id="4" name="Oval 3"/>
           <p:cNvSpPr/>
           <p:nvPr/>
         </p:nvSpPr>
         <p:spPr>
           <a:xfrm>
-            <a:off x="658368" y="1645920"/>
-            <a:ext cx="3246120" cy="3840480"/>
-          </a:xfrm>
-          <a:prstGeom prst="roundRect">
-            <a:avLst>
-              <a:gd name="adj" fmla="val 8000"/>
-            </a:avLst>
+            <a:off x="621792" y="1508760"/>
+            <a:ext cx="310896" cy="310896"/>
+          </a:xfrm>
+          <a:prstGeom prst="ellipse">
+            <a:avLst/>
           </a:prstGeom>
           <a:solidFill>
-            <a:srgbClr val="E5F5FB"/>
+            <a:srgbClr val="009CD6"/>
           </a:solidFill>
           <a:ln>
             <a:noFill/>
@@ -13216,60 +13169,93 @@
           </a:fontRef>
         </p:style>
         <p:txBody>
-          <a:bodyPr rtlCol="0" anchor="t" lIns="128016" rIns="128016" tIns="91440" bIns="54864" wrap="square"/>
+          <a:bodyPr rtlCol="0" anchor="ctr" lIns="0" rIns="0" tIns="0" bIns="0" wrap="square"/>
           <a:lstStyle/>
           <a:p>
-            <a:pPr algn="l">
+            <a:pPr algn="ctr"/>
+            <a:r>
+              <a:rPr sz="1300" b="1" i="0">
+                <a:solidFill>
+                  <a:srgbClr val="FFFFFF"/>
+                </a:solidFill>
+                <a:latin typeface="Arial"/>
+              </a:rPr>
+              <a:t>1</a:t>
+            </a:r>
+          </a:p>
+        </p:txBody>
+      </p:sp>
+      <p:sp>
+        <p:nvSpPr>
+          <p:cNvPr id="5" name="TextBox 4"/>
+          <p:cNvSpPr txBox="1"/>
+          <p:nvPr/>
+        </p:nvSpPr>
+        <p:spPr>
+          <a:xfrm>
+            <a:off x="1115568" y="1463040"/>
+            <a:ext cx="10527487" cy="1028699"/>
+          </a:xfrm>
+          <a:prstGeom prst="rect">
+            <a:avLst/>
+          </a:prstGeom>
+          <a:noFill/>
+        </p:spPr>
+        <p:txBody>
+          <a:bodyPr wrap="square">
+            <a:spAutoFit/>
+          </a:bodyPr>
+          <a:lstStyle/>
+          <a:p>
+            <a:pPr>
               <a:spcAft>
                 <a:spcPts val="300"/>
               </a:spcAft>
             </a:pPr>
             <a:r>
-              <a:rPr sz="1200" b="1" i="0">
-                <a:solidFill>
-                  <a:srgbClr val="006E96"/>
-                </a:solidFill>
-                <a:latin typeface="Arial"/>
-              </a:rPr>
-              <a:t>YOU PASTE</a:t>
-            </a:r>
-          </a:p>
-          <a:p>
-            <a:pPr algn="l">
-              <a:spcAft>
-                <a:spcPts val="300"/>
-              </a:spcAft>
-            </a:pPr>
-            <a:r>
-              <a:rPr sz="1450" b="0" i="0">
+              <a:rPr sz="1900" b="1" i="0">
                 <a:solidFill>
                   <a:srgbClr val="1A1A1A"/>
                 </a:solidFill>
                 <a:latin typeface="Arial"/>
               </a:rPr>
-              <a:t>Your Discovery findings.</a:t>
-            </a:r>
-          </a:p>
-        </p:txBody>
-      </p:sp>
-      <p:sp>
-        <p:nvSpPr>
-          <p:cNvPr id="5" name="Rounded Rectangle 4"/>
+              <a:t>The team is pulled onto the urgent flagship</a:t>
+            </a:r>
+          </a:p>
+          <a:p>
+            <a:pPr>
+              <a:spcAft>
+                <a:spcPts val="300"/>
+              </a:spcAft>
+            </a:pPr>
+            <a:r>
+              <a:rPr sz="1550" b="0" i="0">
+                <a:solidFill>
+                  <a:srgbClr val="595959"/>
+                </a:solidFill>
+                <a:latin typeface="Arial"/>
+              </a:rPr>
+              <a:t>The architecture work simply stops.</a:t>
+            </a:r>
+          </a:p>
+        </p:txBody>
+      </p:sp>
+      <p:sp>
+        <p:nvSpPr>
+          <p:cNvPr id="6" name="Rectangle 5"/>
           <p:cNvSpPr/>
           <p:nvPr/>
         </p:nvSpPr>
         <p:spPr>
           <a:xfrm>
-            <a:off x="4471416" y="1645920"/>
-            <a:ext cx="3246120" cy="3840480"/>
-          </a:xfrm>
-          <a:prstGeom prst="roundRect">
-            <a:avLst>
-              <a:gd name="adj" fmla="val 8000"/>
-            </a:avLst>
+            <a:off x="621792" y="2496312"/>
+            <a:ext cx="10881360" cy="12700"/>
+          </a:xfrm>
+          <a:prstGeom prst="rect">
+            <a:avLst/>
           </a:prstGeom>
           <a:solidFill>
-            <a:srgbClr val="F2F2F2"/>
+            <a:srgbClr val="DDECF4"/>
           </a:solidFill>
           <a:ln>
             <a:noFill/>
@@ -13291,108 +13277,29 @@
           </a:fontRef>
         </p:style>
         <p:txBody>
-          <a:bodyPr rtlCol="0" anchor="t" lIns="128016" rIns="128016" tIns="91440" bIns="54864" wrap="square"/>
+          <a:bodyPr rtlCol="0" anchor="ctr"/>
           <a:lstStyle/>
           <a:p>
-            <a:pPr algn="l">
-              <a:spcAft>
-                <a:spcPts val="300"/>
-              </a:spcAft>
-            </a:pPr>
-            <a:r>
-              <a:rPr sz="1200" b="1" i="0">
-                <a:solidFill>
-                  <a:srgbClr val="006E96"/>
-                </a:solidFill>
-                <a:latin typeface="Arial"/>
-              </a:rPr>
-              <a:t>THE AI RETURNS</a:t>
-            </a:r>
-          </a:p>
-          <a:p>
-            <a:pPr algn="l">
-              <a:spcAft>
-                <a:spcPts val="300"/>
-              </a:spcAft>
-            </a:pPr>
-            <a:r>
-              <a:rPr sz="1450" b="0" i="0">
-                <a:solidFill>
-                  <a:srgbClr val="1A1A1A"/>
-                </a:solidFill>
-                <a:latin typeface="Arial"/>
-              </a:rPr>
-              <a:t>Capability maturity scored.</a:t>
-            </a:r>
-          </a:p>
-          <a:p>
-            <a:pPr algn="l">
-              <a:spcAft>
-                <a:spcPts val="300"/>
-              </a:spcAft>
-            </a:pPr>
-            <a:r>
-              <a:rPr sz="1450" b="0" i="0">
-                <a:solidFill>
-                  <a:srgbClr val="1A1A1A"/>
-                </a:solidFill>
-                <a:latin typeface="Arial"/>
-              </a:rPr>
-              <a:t>The four common gaps, found.</a:t>
-            </a:r>
-          </a:p>
-          <a:p>
-            <a:pPr algn="l">
-              <a:spcAft>
-                <a:spcPts val="300"/>
-              </a:spcAft>
-            </a:pPr>
-            <a:r>
-              <a:rPr sz="1450" b="0" i="0">
-                <a:solidFill>
-                  <a:srgbClr val="1A1A1A"/>
-                </a:solidFill>
-                <a:latin typeface="Arial"/>
-              </a:rPr>
-              <a:t>Ranked by impact and effort.</a:t>
-            </a:r>
-          </a:p>
-          <a:p>
-            <a:pPr algn="l">
-              <a:spcAft>
-                <a:spcPts val="300"/>
-              </a:spcAft>
-            </a:pPr>
-            <a:r>
-              <a:rPr sz="1450" b="0" i="0">
-                <a:solidFill>
-                  <a:srgbClr val="1A1A1A"/>
-                </a:solidFill>
-                <a:latin typeface="Arial"/>
-              </a:rPr>
-              <a:t>Politically sensitive gaps flagged.</a:t>
-            </a:r>
-          </a:p>
-        </p:txBody>
-      </p:sp>
-      <p:sp>
-        <p:nvSpPr>
-          <p:cNvPr id="6" name="Rounded Rectangle 5"/>
+            <a:pPr algn="ctr"/>
+          </a:p>
+        </p:txBody>
+      </p:sp>
+      <p:sp>
+        <p:nvSpPr>
+          <p:cNvPr id="7" name="Oval 6"/>
           <p:cNvSpPr/>
           <p:nvPr/>
         </p:nvSpPr>
         <p:spPr>
           <a:xfrm>
-            <a:off x="8284464" y="1645920"/>
-            <a:ext cx="3246120" cy="3840480"/>
-          </a:xfrm>
-          <a:prstGeom prst="roundRect">
-            <a:avLst>
-              <a:gd name="adj" fmla="val 8000"/>
-            </a:avLst>
+            <a:off x="621792" y="2583179"/>
+            <a:ext cx="310896" cy="310896"/>
+          </a:xfrm>
+          <a:prstGeom prst="ellipse">
+            <a:avLst/>
           </a:prstGeom>
           <a:solidFill>
-            <a:srgbClr val="006E96"/>
+            <a:srgbClr val="009CD6"/>
           </a:solidFill>
           <a:ln>
             <a:noFill/>
@@ -13414,155 +13321,390 @@
           </a:fontRef>
         </p:style>
         <p:txBody>
-          <a:bodyPr rtlCol="0" anchor="t" lIns="128016" rIns="128016" tIns="91440" bIns="54864" wrap="square"/>
+          <a:bodyPr rtlCol="0" anchor="ctr" lIns="0" rIns="0" tIns="0" bIns="0" wrap="square"/>
           <a:lstStyle/>
           <a:p>
-            <a:pPr algn="l">
-              <a:spcAft>
-                <a:spcPts val="300"/>
-              </a:spcAft>
-            </a:pPr>
-            <a:r>
-              <a:rPr sz="1200" b="1" i="0">
+            <a:pPr algn="ctr"/>
+            <a:r>
+              <a:rPr sz="1300" b="1" i="0">
                 <a:solidFill>
                   <a:srgbClr val="FFFFFF"/>
                 </a:solidFill>
                 <a:latin typeface="Arial"/>
               </a:rPr>
-              <a:t>YOU DECIDE</a:t>
-            </a:r>
-          </a:p>
-          <a:p>
-            <a:pPr algn="l">
+              <a:t>2</a:t>
+            </a:r>
+          </a:p>
+        </p:txBody>
+      </p:sp>
+      <p:sp>
+        <p:nvSpPr>
+          <p:cNvPr id="8" name="TextBox 7"/>
+          <p:cNvSpPr txBox="1"/>
+          <p:nvPr/>
+        </p:nvSpPr>
+        <p:spPr>
+          <a:xfrm>
+            <a:off x="1115568" y="2537460"/>
+            <a:ext cx="10527487" cy="1028699"/>
+          </a:xfrm>
+          <a:prstGeom prst="rect">
+            <a:avLst/>
+          </a:prstGeom>
+          <a:noFill/>
+        </p:spPr>
+        <p:txBody>
+          <a:bodyPr wrap="square">
+            <a:spAutoFit/>
+          </a:bodyPr>
+          <a:lstStyle/>
+          <a:p>
+            <a:pPr>
               <a:spcAft>
                 <a:spcPts val="300"/>
               </a:spcAft>
             </a:pPr>
             <a:r>
-              <a:rPr sz="1450" b="0" i="0">
+              <a:rPr sz="1900" b="1" i="0">
+                <a:solidFill>
+                  <a:srgbClr val="1A1A1A"/>
+                </a:solidFill>
+                <a:latin typeface="Arial"/>
+              </a:rPr>
+              <a:t>The sponsor changes</a:t>
+            </a:r>
+          </a:p>
+          <a:p>
+            <a:pPr>
+              <a:spcAft>
+                <a:spcPts val="300"/>
+              </a:spcAft>
+            </a:pPr>
+            <a:r>
+              <a:rPr sz="1550" b="0" i="0">
+                <a:solidFill>
+                  <a:srgbClr val="595959"/>
+                </a:solidFill>
+                <a:latin typeface="Arial"/>
+              </a:rPr>
+              <a:t>The successor has their own priorities.</a:t>
+            </a:r>
+          </a:p>
+        </p:txBody>
+      </p:sp>
+      <p:sp>
+        <p:nvSpPr>
+          <p:cNvPr id="9" name="Rectangle 8"/>
+          <p:cNvSpPr/>
+          <p:nvPr/>
+        </p:nvSpPr>
+        <p:spPr>
+          <a:xfrm>
+            <a:off x="621792" y="3570732"/>
+            <a:ext cx="10881360" cy="12700"/>
+          </a:xfrm>
+          <a:prstGeom prst="rect">
+            <a:avLst/>
+          </a:prstGeom>
+          <a:solidFill>
+            <a:srgbClr val="DDECF4"/>
+          </a:solidFill>
+          <a:ln>
+            <a:noFill/>
+          </a:ln>
+          <a:effectLst/>
+        </p:spPr>
+        <p:style>
+          <a:lnRef idx="1">
+            <a:schemeClr val="accent1"/>
+          </a:lnRef>
+          <a:fillRef idx="3">
+            <a:schemeClr val="accent1"/>
+          </a:fillRef>
+          <a:effectRef idx="2">
+            <a:schemeClr val="accent1"/>
+          </a:effectRef>
+          <a:fontRef idx="minor">
+            <a:schemeClr val="lt1"/>
+          </a:fontRef>
+        </p:style>
+        <p:txBody>
+          <a:bodyPr rtlCol="0" anchor="ctr"/>
+          <a:lstStyle/>
+          <a:p>
+            <a:pPr algn="ctr"/>
+          </a:p>
+        </p:txBody>
+      </p:sp>
+      <p:sp>
+        <p:nvSpPr>
+          <p:cNvPr id="10" name="Oval 9"/>
+          <p:cNvSpPr/>
+          <p:nvPr/>
+        </p:nvSpPr>
+        <p:spPr>
+          <a:xfrm>
+            <a:off x="621792" y="3657599"/>
+            <a:ext cx="310896" cy="310896"/>
+          </a:xfrm>
+          <a:prstGeom prst="ellipse">
+            <a:avLst/>
+          </a:prstGeom>
+          <a:solidFill>
+            <a:srgbClr val="009CD6"/>
+          </a:solidFill>
+          <a:ln>
+            <a:noFill/>
+          </a:ln>
+          <a:effectLst/>
+        </p:spPr>
+        <p:style>
+          <a:lnRef idx="1">
+            <a:schemeClr val="accent1"/>
+          </a:lnRef>
+          <a:fillRef idx="3">
+            <a:schemeClr val="accent1"/>
+          </a:fillRef>
+          <a:effectRef idx="2">
+            <a:schemeClr val="accent1"/>
+          </a:effectRef>
+          <a:fontRef idx="minor">
+            <a:schemeClr val="lt1"/>
+          </a:fontRef>
+        </p:style>
+        <p:txBody>
+          <a:bodyPr rtlCol="0" anchor="ctr" lIns="0" rIns="0" tIns="0" bIns="0" wrap="square"/>
+          <a:lstStyle/>
+          <a:p>
+            <a:pPr algn="ctr"/>
+            <a:r>
+              <a:rPr sz="1300" b="1" i="0">
                 <a:solidFill>
                   <a:srgbClr val="FFFFFF"/>
                 </a:solidFill>
                 <a:latin typeface="Arial"/>
               </a:rPr>
-              <a:t>Check the ground truth.</a:t>
-            </a:r>
-          </a:p>
-          <a:p>
-            <a:pPr algn="l">
+              <a:t>3</a:t>
+            </a:r>
+          </a:p>
+        </p:txBody>
+      </p:sp>
+      <p:sp>
+        <p:nvSpPr>
+          <p:cNvPr id="11" name="TextBox 10"/>
+          <p:cNvSpPr txBox="1"/>
+          <p:nvPr/>
+        </p:nvSpPr>
+        <p:spPr>
+          <a:xfrm>
+            <a:off x="1115568" y="3611879"/>
+            <a:ext cx="10527487" cy="1028699"/>
+          </a:xfrm>
+          <a:prstGeom prst="rect">
+            <a:avLst/>
+          </a:prstGeom>
+          <a:noFill/>
+        </p:spPr>
+        <p:txBody>
+          <a:bodyPr wrap="square">
+            <a:spAutoFit/>
+          </a:bodyPr>
+          <a:lstStyle/>
+          <a:p>
+            <a:pPr>
               <a:spcAft>
                 <a:spcPts val="300"/>
               </a:spcAft>
             </a:pPr>
             <a:r>
-              <a:rPr sz="1450" b="0" i="0">
+              <a:rPr sz="1900" b="1" i="0">
+                <a:solidFill>
+                  <a:srgbClr val="1A1A1A"/>
+                </a:solidFill>
+                <a:latin typeface="Arial"/>
+              </a:rPr>
+              <a:t>Governance drifts to advisory under delivery pressure</a:t>
+            </a:r>
+          </a:p>
+          <a:p>
+            <a:pPr>
+              <a:spcAft>
+                <a:spcPts val="300"/>
+              </a:spcAft>
+            </a:pPr>
+            <a:r>
+              <a:rPr sz="1550" b="0" i="0">
+                <a:solidFill>
+                  <a:srgbClr val="595959"/>
+                </a:solidFill>
+                <a:latin typeface="Arial"/>
+              </a:rPr>
+              <a:t>One powerful project through, then another, until its "no" means nothing.</a:t>
+            </a:r>
+          </a:p>
+        </p:txBody>
+      </p:sp>
+      <p:sp>
+        <p:nvSpPr>
+          <p:cNvPr id="12" name="Rectangle 11"/>
+          <p:cNvSpPr/>
+          <p:nvPr/>
+        </p:nvSpPr>
+        <p:spPr>
+          <a:xfrm>
+            <a:off x="621792" y="4645152"/>
+            <a:ext cx="10881360" cy="12700"/>
+          </a:xfrm>
+          <a:prstGeom prst="rect">
+            <a:avLst/>
+          </a:prstGeom>
+          <a:solidFill>
+            <a:srgbClr val="DDECF4"/>
+          </a:solidFill>
+          <a:ln>
+            <a:noFill/>
+          </a:ln>
+          <a:effectLst/>
+        </p:spPr>
+        <p:style>
+          <a:lnRef idx="1">
+            <a:schemeClr val="accent1"/>
+          </a:lnRef>
+          <a:fillRef idx="3">
+            <a:schemeClr val="accent1"/>
+          </a:fillRef>
+          <a:effectRef idx="2">
+            <a:schemeClr val="accent1"/>
+          </a:effectRef>
+          <a:fontRef idx="minor">
+            <a:schemeClr val="lt1"/>
+          </a:fontRef>
+        </p:style>
+        <p:txBody>
+          <a:bodyPr rtlCol="0" anchor="ctr"/>
+          <a:lstStyle/>
+          <a:p>
+            <a:pPr algn="ctr"/>
+          </a:p>
+        </p:txBody>
+      </p:sp>
+      <p:sp>
+        <p:nvSpPr>
+          <p:cNvPr id="13" name="Oval 12"/>
+          <p:cNvSpPr/>
+          <p:nvPr/>
+        </p:nvSpPr>
+        <p:spPr>
+          <a:xfrm>
+            <a:off x="621792" y="4732020"/>
+            <a:ext cx="310896" cy="310896"/>
+          </a:xfrm>
+          <a:prstGeom prst="ellipse">
+            <a:avLst/>
+          </a:prstGeom>
+          <a:solidFill>
+            <a:srgbClr val="009CD6"/>
+          </a:solidFill>
+          <a:ln>
+            <a:noFill/>
+          </a:ln>
+          <a:effectLst/>
+        </p:spPr>
+        <p:style>
+          <a:lnRef idx="1">
+            <a:schemeClr val="accent1"/>
+          </a:lnRef>
+          <a:fillRef idx="3">
+            <a:schemeClr val="accent1"/>
+          </a:fillRef>
+          <a:effectRef idx="2">
+            <a:schemeClr val="accent1"/>
+          </a:effectRef>
+          <a:fontRef idx="minor">
+            <a:schemeClr val="lt1"/>
+          </a:fontRef>
+        </p:style>
+        <p:txBody>
+          <a:bodyPr rtlCol="0" anchor="ctr" lIns="0" rIns="0" tIns="0" bIns="0" wrap="square"/>
+          <a:lstStyle/>
+          <a:p>
+            <a:pPr algn="ctr"/>
+            <a:r>
+              <a:rPr sz="1300" b="1" i="0">
                 <a:solidFill>
                   <a:srgbClr val="FFFFFF"/>
                 </a:solidFill>
                 <a:latin typeface="Arial"/>
               </a:rPr>
-              <a:t>Defend the ranking.</a:t>
-            </a:r>
-          </a:p>
-          <a:p>
-            <a:pPr algn="l">
+              <a:t>4</a:t>
+            </a:r>
+          </a:p>
+        </p:txBody>
+      </p:sp>
+      <p:sp>
+        <p:nvSpPr>
+          <p:cNvPr id="14" name="TextBox 13"/>
+          <p:cNvSpPr txBox="1"/>
+          <p:nvPr/>
+        </p:nvSpPr>
+        <p:spPr>
+          <a:xfrm>
+            <a:off x="1115568" y="4686300"/>
+            <a:ext cx="10527487" cy="1028699"/>
+          </a:xfrm>
+          <a:prstGeom prst="rect">
+            <a:avLst/>
+          </a:prstGeom>
+          <a:noFill/>
+        </p:spPr>
+        <p:txBody>
+          <a:bodyPr wrap="square">
+            <a:spAutoFit/>
+          </a:bodyPr>
+          <a:lstStyle/>
+          <a:p>
+            <a:pPr>
               <a:spcAft>
                 <a:spcPts val="300"/>
               </a:spcAft>
             </a:pPr>
             <a:r>
-              <a:rPr sz="1450" b="0" i="0">
+              <a:rPr sz="1900" b="1" i="0">
                 <a:solidFill>
-                  <a:srgbClr val="FFFFFF"/>
+                  <a:srgbClr val="1A1A1A"/>
                 </a:solidFill>
                 <a:latin typeface="Arial"/>
               </a:rPr>
-              <a:t>Decide how to handle the flagged gap.</a:t>
-            </a:r>
-          </a:p>
-        </p:txBody>
-      </p:sp>
-      <p:cxnSp>
-        <p:nvCxnSpPr>
-          <p:cNvPr id="7" name="Connector 6"/>
-          <p:cNvCxnSpPr/>
-          <p:nvPr/>
-        </p:nvCxnSpPr>
-        <p:spPr>
-          <a:xfrm>
-            <a:off x="3977639" y="3566160"/>
-            <a:ext cx="420625" cy="0"/>
-          </a:xfrm>
-          <a:prstGeom prst="line">
-            <a:avLst/>
-          </a:prstGeom>
-          <a:ln w="25400">
-            <a:solidFill>
-              <a:srgbClr val="006E96"/>
-            </a:solidFill>
-            <a:tailEnd type="triangle" w="med" len="med"/>
-          </a:ln>
-        </p:spPr>
-        <p:style>
-          <a:lnRef idx="2">
-            <a:schemeClr val="accent1"/>
-          </a:lnRef>
-          <a:fillRef idx="0">
-            <a:schemeClr val="accent1"/>
-          </a:fillRef>
-          <a:effectRef idx="1">
-            <a:schemeClr val="accent1"/>
-          </a:effectRef>
-          <a:fontRef idx="minor">
-            <a:schemeClr val="tx1"/>
-          </a:fontRef>
-        </p:style>
-      </p:cxnSp>
-      <p:cxnSp>
-        <p:nvCxnSpPr>
-          <p:cNvPr id="8" name="Connector 7"/>
-          <p:cNvCxnSpPr/>
-          <p:nvPr/>
-        </p:nvCxnSpPr>
-        <p:spPr>
-          <a:xfrm>
-            <a:off x="7790688" y="3566160"/>
-            <a:ext cx="420624" cy="0"/>
-          </a:xfrm>
-          <a:prstGeom prst="line">
-            <a:avLst/>
-          </a:prstGeom>
-          <a:ln w="25400">
-            <a:solidFill>
-              <a:srgbClr val="006E96"/>
-            </a:solidFill>
-            <a:tailEnd type="triangle" w="med" len="med"/>
-          </a:ln>
-        </p:spPr>
-        <p:style>
-          <a:lnRef idx="2">
-            <a:schemeClr val="accent1"/>
-          </a:lnRef>
-          <a:fillRef idx="0">
-            <a:schemeClr val="accent1"/>
-          </a:fillRef>
-          <a:effectRef idx="1">
-            <a:schemeClr val="accent1"/>
-          </a:effectRef>
-          <a:fontRef idx="minor">
-            <a:schemeClr val="tx1"/>
-          </a:fontRef>
-        </p:style>
-      </p:cxnSp>
-      <p:sp>
-        <p:nvSpPr>
-          <p:cNvPr id="9" name="TextBox 8"/>
+              <a:t>Funding becomes an annual favour</a:t>
+            </a:r>
+          </a:p>
+          <a:p>
+            <a:pPr>
+              <a:spcAft>
+                <a:spcPts val="300"/>
+              </a:spcAft>
+            </a:pPr>
+            <a:r>
+              <a:rPr sz="1550" b="0" i="0">
+                <a:solidFill>
+                  <a:srgbClr val="595959"/>
+                </a:solidFill>
+                <a:latin typeface="Arial"/>
+              </a:rPr>
+              <a:t>One budget cycle removes it.</a:t>
+            </a:r>
+          </a:p>
+        </p:txBody>
+      </p:sp>
+      <p:sp>
+        <p:nvSpPr>
+          <p:cNvPr id="15" name="TextBox 14"/>
           <p:cNvSpPr txBox="1"/>
           <p:nvPr/>
         </p:nvSpPr>
         <p:spPr>
           <a:xfrm>
-            <a:off x="658368" y="5760720"/>
+            <a:off x="658368" y="5870448"/>
             <a:ext cx="10881360" cy="548640"/>
           </a:xfrm>
           <a:prstGeom prst="rect">
@@ -13583,14 +13725,14 @@
                 </a:solidFill>
                 <a:latin typeface="Arial"/>
               </a:rPr>
-              <a:t>The skeleton of the assessment that would otherwise take a week to structure.</a:t>
-            </a:r>
-          </a:p>
-        </p:txBody>
-      </p:sp>
-      <p:sp>
-        <p:nvSpPr>
-          <p:cNvPr id="10" name="TextBox 9"/>
+              <a:t>None of them is dramatic. Each one is a slow fade.</a:t>
+            </a:r>
+          </a:p>
+        </p:txBody>
+      </p:sp>
+      <p:sp>
+        <p:nvSpPr>
+          <p:cNvPr id="16" name="TextBox 15"/>
           <p:cNvSpPr txBox="1"/>
           <p:nvPr/>
         </p:nvSpPr>
@@ -13617,7 +13759,7 @@
                 </a:solidFill>
                 <a:latin typeface="Arial"/>
               </a:rPr>
-              <a:t>5.2 · Play 1 — Draft your Discovery and Assess artefacts</a:t>
+              <a:t>5.2 · What the evidence says works — and what quietly kills these programmes</a:t>
             </a:r>
           </a:p>
         </p:txBody>
@@ -13713,21 +13855,76 @@
                 </a:solidFill>
                 <a:latin typeface="Arial"/>
               </a:rPr>
-              <a:t>The structure is the AI's. The truth and the judgement are yours</a:t>
-            </a:r>
-          </a:p>
-        </p:txBody>
-      </p:sp>
-      <p:sp>
-        <p:nvSpPr>
-          <p:cNvPr id="4" name="Rounded Rectangle 3"/>
+              <a:t>Not one of the killers is about technology</a:t>
+            </a:r>
+          </a:p>
+        </p:txBody>
+      </p:sp>
+      <p:sp>
+        <p:nvSpPr>
+          <p:cNvPr id="4" name="TextBox 3"/>
+          <p:cNvSpPr txBox="1"/>
+          <p:nvPr/>
+        </p:nvSpPr>
+        <p:spPr>
+          <a:xfrm>
+            <a:off x="658368" y="1600200"/>
+            <a:ext cx="10881360" cy="2651760"/>
+          </a:xfrm>
+          <a:prstGeom prst="rect">
+            <a:avLst/>
+          </a:prstGeom>
+          <a:noFill/>
+        </p:spPr>
+        <p:txBody>
+          <a:bodyPr wrap="square">
+            <a:spAutoFit/>
+          </a:bodyPr>
+          <a:lstStyle/>
+          <a:p>
+            <a:pPr>
+              <a:spcAft>
+                <a:spcPts val="1200"/>
+              </a:spcAft>
+            </a:pPr>
+            <a:r>
+              <a:rPr sz="2000" b="0" i="0">
+                <a:solidFill>
+                  <a:srgbClr val="1A1A1A"/>
+                </a:solidFill>
+                <a:latin typeface="Arial"/>
+              </a:rPr>
+              <a:t>They are about people, authority and money — protecting the team, securing the mandate, defending the governance, locking in the funding.</a:t>
+            </a:r>
+          </a:p>
+          <a:p>
+            <a:pPr>
+              <a:spcAft>
+                <a:spcPts val="1200"/>
+              </a:spcAft>
+            </a:pPr>
+            <a:r>
+              <a:rPr sz="2000" b="0" i="0">
+                <a:solidFill>
+                  <a:srgbClr val="1A1A1A"/>
+                </a:solidFill>
+                <a:latin typeface="Arial"/>
+              </a:rPr>
+              <a:t>Which is the good news, because those are what you can influence. The chief architect cannot protect their own team or secure their own five-year budget. Only the strategist who commissioned the work can.</a:t>
+            </a:r>
+          </a:p>
+        </p:txBody>
+      </p:sp>
+      <p:sp>
+        <p:nvSpPr>
+          <p:cNvPr id="5" name="Rounded Rectangle 4"/>
           <p:cNvSpPr/>
           <p:nvPr/>
         </p:nvSpPr>
         <p:spPr>
           <a:xfrm>
-            <a:off x="658368" y="1554480"/>
-            <a:ext cx="5394960" cy="3977639"/>
+            <a:off x="658368" y="4434840"/>
+            <a:ext cx="10881360" cy="1325880"/>
           </a:xfrm>
           <a:prstGeom prst="roundRect">
             <a:avLst>
@@ -13766,14 +13963,14 @@
       </p:sp>
       <p:sp>
         <p:nvSpPr>
-          <p:cNvPr id="5" name="TextBox 4"/>
+          <p:cNvPr id="6" name="TextBox 5"/>
           <p:cNvSpPr txBox="1"/>
           <p:nvPr/>
         </p:nvSpPr>
         <p:spPr>
           <a:xfrm>
-            <a:off x="859536" y="1700784"/>
-            <a:ext cx="4992624" cy="3703320"/>
+            <a:off x="859536" y="4626864"/>
+            <a:ext cx="10479024" cy="1051560"/>
           </a:xfrm>
           <a:prstGeom prst="rect">
             <a:avLst/>
@@ -13792,235 +13989,20 @@
               </a:spcAft>
             </a:pPr>
             <a:r>
-              <a:rPr sz="1900" b="1" i="0">
+              <a:rPr sz="2300" b="1" i="0">
                 <a:solidFill>
                   <a:srgbClr val="006E96"/>
                 </a:solidFill>
                 <a:latin typeface="Arial"/>
               </a:rPr>
-              <a:t>THE AI GETS RIGHT</a:t>
-            </a:r>
-          </a:p>
-          <a:p>
-            <a:pPr>
-              <a:spcAft>
-                <a:spcPts val="700"/>
-              </a:spcAft>
-            </a:pPr>
-            <a:r>
-              <a:rPr sz="1600" b="0" i="0">
-                <a:solidFill>
-                  <a:srgbClr val="1A1A1A"/>
-                </a:solidFill>
-                <a:latin typeface="Arial"/>
-              </a:rPr>
-              <a:t>Structure and completeness.</a:t>
-            </a:r>
-          </a:p>
-          <a:p>
-            <a:pPr>
-              <a:spcAft>
-                <a:spcPts val="700"/>
-              </a:spcAft>
-            </a:pPr>
-            <a:r>
-              <a:rPr sz="1600" b="0" i="0">
-                <a:solidFill>
-                  <a:srgbClr val="1A1A1A"/>
-                </a:solidFill>
-                <a:latin typeface="Arial"/>
-              </a:rPr>
-              <a:t>It will not forget to score a capability.</a:t>
-            </a:r>
-          </a:p>
-          <a:p>
-            <a:pPr>
-              <a:spcAft>
-                <a:spcPts val="700"/>
-              </a:spcAft>
-            </a:pPr>
-            <a:r>
-              <a:rPr sz="1600" b="0" i="0">
-                <a:solidFill>
-                  <a:srgbClr val="1A1A1A"/>
-                </a:solidFill>
-                <a:latin typeface="Arial"/>
-              </a:rPr>
-              <a:t>It will not forget to check for duplicate registries.</a:t>
-            </a:r>
-          </a:p>
-        </p:txBody>
-      </p:sp>
-      <p:sp>
-        <p:nvSpPr>
-          <p:cNvPr id="6" name="Rounded Rectangle 5"/>
-          <p:cNvSpPr/>
-          <p:nvPr/>
-        </p:nvSpPr>
-        <p:spPr>
-          <a:xfrm>
-            <a:off x="6263640" y="1554480"/>
-            <a:ext cx="5394960" cy="3977639"/>
-          </a:xfrm>
-          <a:prstGeom prst="roundRect">
-            <a:avLst>
-              <a:gd name="adj" fmla="val 4500"/>
-            </a:avLst>
-          </a:prstGeom>
-          <a:solidFill>
-            <a:srgbClr val="F2F2F2"/>
-          </a:solidFill>
-          <a:ln>
-            <a:noFill/>
-          </a:ln>
-          <a:effectLst/>
-        </p:spPr>
-        <p:style>
-          <a:lnRef idx="1">
-            <a:schemeClr val="accent1"/>
-          </a:lnRef>
-          <a:fillRef idx="3">
-            <a:schemeClr val="accent1"/>
-          </a:fillRef>
-          <a:effectRef idx="2">
-            <a:schemeClr val="accent1"/>
-          </a:effectRef>
-          <a:fontRef idx="minor">
-            <a:schemeClr val="lt1"/>
-          </a:fontRef>
-        </p:style>
-        <p:txBody>
-          <a:bodyPr rtlCol="0" anchor="ctr"/>
-          <a:lstStyle/>
-          <a:p>
-            <a:pPr algn="ctr"/>
+              <a:t>The failures are organisational, which means they are yours to prevent.</a:t>
+            </a:r>
           </a:p>
         </p:txBody>
       </p:sp>
       <p:sp>
         <p:nvSpPr>
           <p:cNvPr id="7" name="TextBox 6"/>
-          <p:cNvSpPr txBox="1"/>
-          <p:nvPr/>
-        </p:nvSpPr>
-        <p:spPr>
-          <a:xfrm>
-            <a:off x="6464808" y="1700784"/>
-            <a:ext cx="4992624" cy="3703320"/>
-          </a:xfrm>
-          <a:prstGeom prst="rect">
-            <a:avLst/>
-          </a:prstGeom>
-          <a:noFill/>
-        </p:spPr>
-        <p:txBody>
-          <a:bodyPr wrap="square">
-            <a:spAutoFit/>
-          </a:bodyPr>
-          <a:lstStyle/>
-          <a:p>
-            <a:pPr>
-              <a:spcAft>
-                <a:spcPts val="700"/>
-              </a:spcAft>
-            </a:pPr>
-            <a:r>
-              <a:rPr sz="1900" b="1" i="0">
-                <a:solidFill>
-                  <a:srgbClr val="006E96"/>
-                </a:solidFill>
-                <a:latin typeface="Arial"/>
-              </a:rPr>
-              <a:t>THE AI CANNOT</a:t>
-            </a:r>
-          </a:p>
-          <a:p>
-            <a:pPr>
-              <a:spcAft>
-                <a:spcPts val="700"/>
-              </a:spcAft>
-            </a:pPr>
-            <a:r>
-              <a:rPr sz="1600" b="0" i="0">
-                <a:solidFill>
-                  <a:srgbClr val="1A1A1A"/>
-                </a:solidFill>
-                <a:latin typeface="Arial"/>
-              </a:rPr>
-              <a:t>Know the ground truth.</a:t>
-            </a:r>
-          </a:p>
-          <a:p>
-            <a:pPr>
-              <a:spcAft>
-                <a:spcPts val="700"/>
-              </a:spcAft>
-            </a:pPr>
-            <a:r>
-              <a:rPr sz="1600" b="0" i="0">
-                <a:solidFill>
-                  <a:srgbClr val="1A1A1A"/>
-                </a:solidFill>
-                <a:latin typeface="Arial"/>
-              </a:rPr>
-              <a:t>Feel the political weight of a gap a powerful programme will fight to keep.</a:t>
-            </a:r>
-          </a:p>
-          <a:p>
-            <a:pPr>
-              <a:spcAft>
-                <a:spcPts val="700"/>
-              </a:spcAft>
-            </a:pPr>
-            <a:r>
-              <a:rPr sz="1600" b="0" i="0">
-                <a:solidFill>
-                  <a:srgbClr val="1A1A1A"/>
-                </a:solidFill>
-                <a:latin typeface="Arial"/>
-              </a:rPr>
-              <a:t>Tell whether a "fact" in your notes is actually true.</a:t>
-            </a:r>
-          </a:p>
-        </p:txBody>
-      </p:sp>
-      <p:sp>
-        <p:nvSpPr>
-          <p:cNvPr id="8" name="TextBox 7"/>
-          <p:cNvSpPr txBox="1"/>
-          <p:nvPr/>
-        </p:nvSpPr>
-        <p:spPr>
-          <a:xfrm>
-            <a:off x="658368" y="5715000"/>
-            <a:ext cx="10881360" cy="548640"/>
-          </a:xfrm>
-          <a:prstGeom prst="rect">
-            <a:avLst/>
-          </a:prstGeom>
-          <a:noFill/>
-        </p:spPr>
-        <p:txBody>
-          <a:bodyPr wrap="square">
-            <a:spAutoFit/>
-          </a:bodyPr>
-          <a:lstStyle/>
-          <a:p>
-            <a:r>
-              <a:rPr sz="1550" b="1" i="0">
-                <a:solidFill>
-                  <a:srgbClr val="006E96"/>
-                </a:solidFill>
-                <a:latin typeface="Arial"/>
-              </a:rPr>
-              <a:t>It scores what your notes say, not what is real.</a:t>
-            </a:r>
-          </a:p>
-        </p:txBody>
-      </p:sp>
-      <p:sp>
-        <p:nvSpPr>
-          <p:cNvPr id="9" name="TextBox 8"/>
           <p:cNvSpPr txBox="1"/>
           <p:nvPr/>
         </p:nvSpPr>
@@ -14047,7 +14029,7 @@
                 </a:solidFill>
                 <a:latin typeface="Arial"/>
               </a:rPr>
-              <a:t>5.2 · Play 1 — Draft your Discovery and Assess artefacts</a:t>
+              <a:t>5.2 · What the evidence says works — and what quietly kills these programmes</a:t>
             </a:r>
           </a:p>
         </p:txBody>
@@ -14143,7 +14125,7 @@
                 </a:solidFill>
                 <a:latin typeface="Arial"/>
               </a:rPr>
-              <a:t>The play gives you the flag. You provide the courage</a:t>
+              <a:t>Design for the second year now, while you have the minister's attention</a:t>
             </a:r>
           </a:p>
         </p:txBody>
@@ -14157,7 +14139,7 @@
         <p:spPr>
           <a:xfrm>
             <a:off x="658368" y="1600200"/>
-            <a:ext cx="10881360" cy="1984248"/>
+            <a:ext cx="10881360" cy="2651760"/>
           </a:xfrm>
           <a:prstGeom prst="rect">
             <a:avLst/>
@@ -14182,7 +14164,7 @@
                 </a:solidFill>
                 <a:latin typeface="Arial"/>
               </a:rPr>
-              <a:t>The AI marks the duplicate learner list a powerful programme owns as a politically sensitive gap. But it cannot decide how to handle it — that is your call, made with the decision-maker, not softened to avoid a fight.</a:t>
+              <a:t>Get the team's protection in writing. Make the governance mandate legal, not just a memo. Secure a multi-year envelope, not an annual line.</a:t>
             </a:r>
           </a:p>
           <a:p>
@@ -14198,7 +14180,7 @@
                 </a:solidFill>
                 <a:latin typeface="Arial"/>
               </a:rPr>
-              <a:t>An assessment that flatters the current state to keep the peace fails quietly, a year later, when the flagship still does not exist.</a:t>
+              <a:t>And plan to re-commit all of it when the sponsor changes, because the next minister will not feel bound by the last one's promises.</a:t>
             </a:r>
           </a:p>
         </p:txBody>
@@ -14211,7 +14193,7 @@
         </p:nvSpPr>
         <p:spPr>
           <a:xfrm>
-            <a:off x="658368" y="3767328"/>
+            <a:off x="658368" y="4434840"/>
             <a:ext cx="10881360" cy="1325880"/>
           </a:xfrm>
           <a:prstGeom prst="roundRect">
@@ -14257,7 +14239,7 @@
         </p:nvSpPr>
         <p:spPr>
           <a:xfrm>
-            <a:off x="859536" y="3959352"/>
+            <a:off x="859536" y="4626864"/>
             <a:ext cx="10479024" cy="1051560"/>
           </a:xfrm>
           <a:prstGeom prst="rect">
@@ -14283,7 +14265,7 @@
                 </a:solidFill>
                 <a:latin typeface="Arial"/>
               </a:rPr>
-              <a:t>Of everything this play produces, the honesty flag matters most.</a:t>
+              <a:t>Not afterthoughts to add if the programme survives. They are how it survives.</a:t>
             </a:r>
           </a:p>
         </p:txBody>
@@ -14317,7 +14299,7 @@
                 </a:solidFill>
                 <a:latin typeface="Arial"/>
               </a:rPr>
-              <a:t>5.2 · Play 1 — Draft your Discovery and Assess artefacts</a:t>
+              <a:t>5.2 · What the evidence says works — and what quietly kills these programmes</a:t>
             </a:r>
           </a:p>
         </p:txBody>
@@ -14369,7 +14351,7 @@
                 </a:solidFill>
                 <a:latin typeface="Arial"/>
               </a:rPr>
-              <a:t>This play turns raw Discovery notes into a capture template and a ranked gap analysis in minutes — the AI supplies the structure; you supply the ground truth and the honesty.</a:t>
+              <a:t>What kills these programmes is organisational, not technical — the team pulled, the sponsor changed, governance gone advisory, funding withdrawn — so design the protections in from the start.</a:t>
             </a:r>
           </a:p>
         </p:txBody>
@@ -14437,7 +14419,7 @@
                 </a:solidFill>
                 <a:latin typeface="Arial"/>
               </a:rPr>
-              <a:t>5.2 · Play 1 — Draft your Discovery and Assess artefacts</a:t>
+              <a:t>5.2 · What the evidence says works — and what quietly kills these programmes</a:t>
             </a:r>
           </a:p>
         </p:txBody>
@@ -14607,7 +14589,7 @@
                 </a:solidFill>
                 <a:latin typeface="Arial"/>
               </a:rPr>
-              <a:t>•  PAERA v1.0 — §3.1.3 (Readiness Assessment)</a:t>
+              <a:t>•  PAERA v1.0 — §5.4 (Organisational Assessment &amp; Roadmap)</a:t>
             </a:r>
           </a:p>
           <a:p>
@@ -14623,23 +14605,7 @@
                 </a:solidFill>
                 <a:latin typeface="Arial"/>
               </a:rPr>
-              <a:t>•  PAERA v1.0 — §5.1 (Capabilities Assessment)</a:t>
-            </a:r>
-          </a:p>
-          <a:p>
-            <a:pPr>
-              <a:spcAft>
-                <a:spcPts val="1200"/>
-              </a:spcAft>
-            </a:pPr>
-            <a:r>
-              <a:rPr sz="1700" b="0" i="0">
-                <a:solidFill>
-                  <a:srgbClr val="1A1A1A"/>
-                </a:solidFill>
-                <a:latin typeface="Arial"/>
-              </a:rPr>
-              <a:t>•  PAERA v1.0 — §5.4 (Organisational Assessment &amp; Roadmap)</a:t>
+              <a:t>•  PAERA v1.0 — §4.2.1 (Management)</a:t>
             </a:r>
           </a:p>
         </p:txBody>
@@ -14707,7 +14673,7 @@
                 </a:solidFill>
                 <a:latin typeface="Arial"/>
               </a:rPr>
-              <a:t>5.2 · Play 1 — Draft your Discovery and Assess artefacts</a:t>
+              <a:t>5.2 · What the evidence says works — and what quietly kills these programmes</a:t>
             </a:r>
           </a:p>
         </p:txBody>
